--- a/klyuchevye-voennye-pobedy-rossii/prezentatsiya.pptx
+++ b/klyuchevye-voennye-pobedy-rossii/prezentatsiya.pptx
@@ -16,7 +16,6 @@
     <p:sldId id="264" r:id="rId16"/>
     <p:sldId id="265" r:id="rId17"/>
     <p:sldId id="266" r:id="rId18"/>
-    <p:sldId id="267" r:id="rId19"/>
   </p:sldIdLst>
   <p:sldSz cx="12188952" cy="6858000" type="screen4x3"/>
   <p:notesSz cx="6858000" cy="9144000"/>
@@ -513,7 +512,7 @@
           <a:lstStyle/>
           <a:p>
             <a:r>
-              <a:t>Вступление 30 секунд: тема доклада, почему победы важны для государственности. Сразу обозначь критерий отбора — это покажет, что работа осмысленная, а не список из интернета.</a:t>
+              <a:t>Вступление 20–30 секунд: тема — семь ключевых побед. Сразу назвать критерий отбора, чтобы было видно: список не случайный.</a:t>
             </a:r>
           </a:p>
         </p:txBody>
@@ -583,7 +582,7 @@
           <a:lstStyle/>
           <a:p>
             <a:r>
-              <a:t>Главный выводной слайд. Пять пунктов — это готовый ответ на вопрос «в чём значение побед для государственности?».</a:t>
+              <a:t>Финал доклада: назвать фронты и командующих, Рейхстаг, цену Победы. Пауза перед цифрой 27 млн. Время — 40–50 секунд на слайд.</a:t>
             </a:r>
           </a:p>
         </p:txBody>
@@ -653,77 +652,7 @@
           <a:lstStyle/>
           <a:p>
             <a:r>
-              <a:t>Слайд про актуальность: показать, что даты не из Википедии, а из действующего закона. Для курса это пример того, как государство работает с исторической памятью.</a:t>
-            </a:r>
-          </a:p>
-        </p:txBody>
-      </p:sp>
-      <p:sp>
-        <p:nvSpPr>
-          <p:cNvPr id="4" name="Slide Number Placeholder 3"/>
-          <p:cNvSpPr>
-            <a:spLocks noGrp="1"/>
-          </p:cNvSpPr>
-          <p:nvPr>
-            <p:ph type="sldNum" idx="5" sz="quarter"/>
-          </p:nvPr>
-        </p:nvSpPr>
-        <p:spPr/>
-      </p:sp>
-    </p:spTree>
-  </p:cSld>
-  <p:clrMapOvr>
-    <a:masterClrMapping/>
-  </p:clrMapOvr>
-</p:notes>
-</file>
-
-<file path=ppt/notesSlides/notesSlide12.xml><?xml version="1.0" encoding="utf-8"?>
-<p:notes xmlns:a="http://schemas.openxmlformats.org/drawingml/2006/main" xmlns:p="http://schemas.openxmlformats.org/presentationml/2006/main" xmlns:r="http://schemas.openxmlformats.org/officeDocument/2006/relationships">
-  <p:cSld>
-    <p:spTree>
-      <p:nvGrpSpPr>
-        <p:cNvPr id="1" name=""/>
-        <p:cNvGrpSpPr/>
-        <p:nvPr/>
-      </p:nvGrpSpPr>
-      <p:grpSpPr>
-        <a:xfrm>
-          <a:off x="0" y="0"/>
-          <a:ext cx="0" cy="0"/>
-          <a:chOff x="0" y="0"/>
-          <a:chExt cx="0" cy="0"/>
-        </a:xfrm>
-      </p:grpSpPr>
-      <p:sp>
-        <p:nvSpPr>
-          <p:cNvPr id="2" name="Slide Image Placeholder 1"/>
-          <p:cNvSpPr>
-            <a:spLocks noGrp="1"/>
-          </p:cNvSpPr>
-          <p:nvPr>
-            <p:ph type="sldImg" idx="2"/>
-          </p:nvPr>
-        </p:nvSpPr>
-        <p:spPr/>
-      </p:sp>
-      <p:sp>
-        <p:nvSpPr>
-          <p:cNvPr id="3" name="Notes Placeholder 2"/>
-          <p:cNvSpPr>
-            <a:spLocks noGrp="1"/>
-          </p:cNvSpPr>
-          <p:nvPr>
-            <p:ph type="body" idx="3" sz="quarter"/>
-          </p:nvPr>
-        </p:nvSpPr>
-        <p:spPr/>
-        <p:txBody>
-          <a:bodyPr/>
-          <a:lstStyle/>
-          <a:p>
-            <a:r>
-              <a:t>Финал 20–30 секунд: повторить тезис одним предложением, назвать источники, поблагодарить. Если спросят про цифры — честно сказать: по старым векам это оценки историков.</a:t>
+              <a:t>Финал 20 секунд: одна фраза-вывод, источники, благодарность. Если спросят про цифры — честно: по старым векам это оценки историков, точных данных нет.</a:t>
             </a:r>
           </a:p>
         </p:txBody>
@@ -793,7 +722,7 @@
           <a:lstStyle/>
           <a:p>
             <a:r>
-              <a:t>Этот слайд — главный для предмета. Препод по Основам государственности ждёт не пересказ битв, а связь с понятиями курса: суверенитет, единство, ценности, преемственность.</a:t>
+              <a:t>Обзорный слайд: за 20 секунд перечислить все семь побед. Дальше — подробно о каждой.</a:t>
             </a:r>
           </a:p>
         </p:txBody>
@@ -863,7 +792,7 @@
           <a:lstStyle/>
           <a:p>
             <a:r>
-              <a:t>Первая веха: защита молодой Руси с запада. Невский — символ выбора своего пути развития. Говори по 35–40 секунд на слайд.</a:t>
+              <a:t>Рассказать тактику: слабый центр, сильные фланги, окружение. Подчеркнуть: цифры — оценки, точных данных за XIII век нет ни у кого, это честная позиция. Время — 40–50 секунд на слайд.</a:t>
             </a:r>
           </a:p>
         </p:txBody>
@@ -933,7 +862,7 @@
           <a:lstStyle/>
           <a:p>
             <a:r>
-              <a:t>Несмотря на то что иго продлится ещё 100 лет, значение — в рождении общерусского единства. Говори по 35–40 секунд на слайд.</a:t>
+              <a:t>Главное: засадный полк как решающий ход и то, что полки шли под знамёнами разных княжеств — но как единое войско. Время — 40–50 секунд на слайд.</a:t>
             </a:r>
           </a:p>
         </p:txBody>
@@ -1003,7 +932,7 @@
           <a:lstStyle/>
           <a:p>
             <a:r>
-              <a:t>Ключевой пример: государства фактически не было — и его восстановил сам народ. Прямая иллюстрация единства. Говори по 35–40 секунд на слайд.</a:t>
+              <a:t>Сделать акцент на двух этапах: сначала разбили деблокаду Ходкевича, потом дожали гарнизон голодом. Это победа не царя, а ополчения. Время — 40–50 секунд на слайд.</a:t>
             </a:r>
           </a:p>
         </p:txBody>
@@ -1073,7 +1002,7 @@
           <a:lstStyle/>
           <a:p>
             <a:r>
-              <a:t>От обороны — к статусу империи. Полтава открыла путь к Балтике и Петербургу. Говори по 35–40 секунд на слайд.</a:t>
+              <a:t>Сильные факты: гарнизон Полтавы, редуты Петра, разгром за 2 часа, Переволочна. Артиллерия — ключевое преимущество. Время — 40–50 секунд на слайд.</a:t>
             </a:r>
           </a:p>
         </p:txBody>
@@ -1143,7 +1072,7 @@
           <a:lstStyle/>
           <a:p>
             <a:r>
-              <a:t>Народный характер войны: ополчение, партизаны. День славы Бородина — 8 сентября. Говори по 35–40 секунд на слайд.</a:t>
+              <a:t>Бородино — не победа в тактическом смысле, а стратегическая: армия сохранена, а враг погиб. Так и сказать честно — это оценят. Время — 40–50 секунд на слайд.</a:t>
             </a:r>
           </a:p>
         </p:txBody>
@@ -1213,7 +1142,7 @@
           <a:lstStyle/>
           <a:p>
             <a:r>
-              <a:t>Сталинград — символ стойкости. Подчеркнуть цену: потери с обеих сторон — более миллиона человек. Говори по 35–40 секунд на слайд.</a:t>
+              <a:t>Три фазы: выстоять — окружить — уничтожить. Даты операции «Уран» и капитуляции назвать точно. Время — 40–50 секунд на слайд.</a:t>
             </a:r>
           </a:p>
         </p:txBody>
@@ -1283,7 +1212,7 @@
           <a:lstStyle/>
           <a:p>
             <a:r>
-              <a:t>Финал линии: от Чудского озера до Берлина — непрерывная защита Отечества. 9 мая — главный праздник. Говори по 35–40 секунд на слайд.</a:t>
+              <a:t>Логика: вымотать в обороне — разбить в наступлении. Прохоровка и первый салют — яркие детали. Время — 40–50 секунд на слайд.</a:t>
             </a:r>
           </a:p>
         </p:txBody>
@@ -4405,7 +4334,7 @@
               </a:defRPr>
             </a:pPr>
             <a:r>
-              <a:t>От Ледового побоища до Великой Победы: как победы сформировали российскую государственность</a:t>
+              <a:t>Семь сражений, изменивших ход истории: даты, полководцы, ход боёв и итоги</a:t>
             </a:r>
           </a:p>
         </p:txBody>
@@ -4495,7 +4424,7 @@
               </a:defRPr>
             </a:pPr>
             <a:r>
-              <a:t>Критерий отбора: победа изменила ход истории и укрепила государство, а не просто выиграла сражение</a:t>
+              <a:t>Отбор: победа должна была изменить ход истории, а дата — входить в дни воинской славы (ФЗ № 32-ФЗ)</a:t>
             </a:r>
           </a:p>
         </p:txBody>
@@ -4642,7 +4571,7 @@
               </a:defRPr>
             </a:pPr>
             <a:r>
-              <a:t>Вывод  •  связь с курсом</a:t>
+              <a:t>16 апреля — 9 мая 1945</a:t>
             </a:r>
           </a:p>
           <a:p>
@@ -4654,7 +4583,7 @@
               </a:defRPr>
             </a:pPr>
             <a:r>
-              <a:t>Что объединяет все победы?</a:t>
+              <a:t>Взятие Берлина. Победа</a:t>
             </a:r>
           </a:p>
         </p:txBody>
@@ -4667,8 +4596,8 @@
         </p:nvSpPr>
         <p:spPr>
           <a:xfrm>
-            <a:off x="640080" y="1920240"/>
-            <a:ext cx="10881360" cy="4023360"/>
+            <a:off x="640080" y="1783080"/>
+            <a:ext cx="10881360" cy="2834640"/>
           </a:xfrm>
           <a:prstGeom prst="rect">
             <a:avLst/>
@@ -4683,123 +4612,225 @@
           <a:p>
             <a:pPr>
               <a:spcAft>
-                <a:spcPts val="800"/>
+                <a:spcPts val="600"/>
               </a:spcAft>
             </a:pPr>
             <a:r>
-              <a:rPr sz="1900" b="1">
+              <a:rPr sz="1700" b="1">
                 <a:solidFill>
                   <a:srgbClr val="1B2A4A"/>
                 </a:solidFill>
               </a:rPr>
-              <a:t>1. Оборонительный характер. </a:t>
-            </a:r>
-            <a:r>
-              <a:rPr sz="1900">
+              <a:t>Силы: </a:t>
+            </a:r>
+            <a:r>
+              <a:rPr sz="1700">
                 <a:solidFill>
                   <a:srgbClr val="222222"/>
                 </a:solidFill>
               </a:rPr>
-              <a:t>Россия защищала свою землю и независимость.</a:t>
+              <a:t>три фронта — Жуков, Конев, Рокоссовский — против группировки ~1 млн человек.</a:t>
             </a:r>
           </a:p>
           <a:p>
             <a:pPr>
               <a:spcAft>
-                <a:spcPts val="800"/>
+                <a:spcPts val="600"/>
               </a:spcAft>
             </a:pPr>
             <a:r>
-              <a:rPr sz="1900" b="1">
+              <a:rPr sz="1700" b="1">
                 <a:solidFill>
                   <a:srgbClr val="1B2A4A"/>
                 </a:solidFill>
               </a:rPr>
-              <a:t>2. Побеждал народ. </a:t>
-            </a:r>
-            <a:r>
-              <a:rPr sz="1900">
+              <a:t>Прорыв: </a:t>
+            </a:r>
+            <a:r>
+              <a:rPr sz="1700">
                 <a:solidFill>
                   <a:srgbClr val="222222"/>
                 </a:solidFill>
               </a:rPr>
-              <a:t>Ополчение 1612-го, партизаны 1812-го, добровольцы 1941-го.</a:t>
+              <a:t>форсирование Одера и Нейсе, бои за Зееловские высоты, окружение Берлина.</a:t>
             </a:r>
           </a:p>
           <a:p>
             <a:pPr>
               <a:spcAft>
-                <a:spcPts val="800"/>
+                <a:spcPts val="600"/>
               </a:spcAft>
             </a:pPr>
             <a:r>
-              <a:rPr sz="1900" b="1">
+              <a:rPr sz="1700" b="1">
                 <a:solidFill>
                   <a:srgbClr val="1B2A4A"/>
                 </a:solidFill>
               </a:rPr>
-              <a:t>3. Единство в критический момент. </a:t>
-            </a:r>
-            <a:r>
-              <a:rPr sz="1900">
+              <a:t>Штурм: </a:t>
+            </a:r>
+            <a:r>
+              <a:rPr sz="1700">
                 <a:solidFill>
                   <a:srgbClr val="222222"/>
                 </a:solidFill>
               </a:rPr>
-              <a:t>Разрозненные княжества, сословия, народы — единый фронт.</a:t>
+              <a:t>уличные бои; 30 апреля — Знамя Победы над Рейхстагом (Егоров и Кантария).</a:t>
             </a:r>
           </a:p>
           <a:p>
             <a:pPr>
               <a:spcAft>
-                <a:spcPts val="800"/>
+                <a:spcPts val="600"/>
               </a:spcAft>
             </a:pPr>
             <a:r>
-              <a:rPr sz="1900" b="1">
+              <a:rPr sz="1700" b="1">
                 <a:solidFill>
                   <a:srgbClr val="1B2A4A"/>
                 </a:solidFill>
               </a:rPr>
-              <a:t>4. Долгий след. </a:t>
-            </a:r>
-            <a:r>
-              <a:rPr sz="1900">
+              <a:t>Капитуляция: </a:t>
+            </a:r>
+            <a:r>
+              <a:rPr sz="1700">
                 <a:solidFill>
                   <a:srgbClr val="222222"/>
                 </a:solidFill>
               </a:rPr>
-              <a:t>Каждая победа определяла развитие страны на десятилетия вперёд.</a:t>
+              <a:t>в ночь на 9 мая по Москве подписан Акт о безоговорочной капитуляции.</a:t>
             </a:r>
           </a:p>
           <a:p>
             <a:pPr>
               <a:spcAft>
-                <a:spcPts val="800"/>
+                <a:spcPts val="600"/>
               </a:spcAft>
             </a:pPr>
             <a:r>
-              <a:rPr sz="1900" b="1">
+              <a:rPr sz="1700" b="1">
                 <a:solidFill>
                   <a:srgbClr val="1B2A4A"/>
                 </a:solidFill>
               </a:rPr>
-              <a:t>5. Память как институт. </a:t>
-            </a:r>
-            <a:r>
-              <a:rPr sz="1900">
+              <a:t>Цена Победы: </a:t>
+            </a:r>
+            <a:r>
+              <a:rPr sz="1700">
                 <a:solidFill>
                   <a:srgbClr val="222222"/>
                 </a:solidFill>
               </a:rPr>
-              <a:t>Дни воинской славы, 9 Мая, 4 Ноября — государство хранит память о победах.</a:t>
-            </a:r>
-          </a:p>
-        </p:txBody>
-      </p:sp>
-      <p:sp>
-        <p:nvSpPr>
-          <p:cNvPr id="6" name="TextBox 5"/>
+              <a:t>около 27 млн жизней советских граждан за годы войны.</a:t>
+            </a:r>
+          </a:p>
+        </p:txBody>
+      </p:sp>
+      <p:sp>
+        <p:nvSpPr>
+          <p:cNvPr id="6" name="Rectangle 5"/>
+          <p:cNvSpPr/>
+          <p:nvPr/>
+        </p:nvSpPr>
+        <p:spPr>
+          <a:xfrm>
+            <a:off x="640080" y="4709160"/>
+            <a:ext cx="10881360" cy="1325880"/>
+          </a:xfrm>
+          <a:prstGeom prst="rect">
+            <a:avLst/>
+          </a:prstGeom>
+          <a:solidFill>
+            <a:srgbClr val="F1ECDF"/>
+          </a:solidFill>
+          <a:ln>
+            <a:noFill/>
+          </a:ln>
+        </p:spPr>
+        <p:style>
+          <a:lnRef idx="1">
+            <a:schemeClr val="accent1"/>
+          </a:lnRef>
+          <a:fillRef idx="3">
+            <a:schemeClr val="accent1"/>
+          </a:fillRef>
+          <a:effectRef idx="2">
+            <a:schemeClr val="accent1"/>
+          </a:effectRef>
+          <a:fontRef idx="minor">
+            <a:schemeClr val="lt1"/>
+          </a:fontRef>
+        </p:style>
+        <p:txBody>
+          <a:bodyPr rtlCol="0" anchor="ctr" wrap="square" lIns="228600" rIns="228600"/>
+          <a:lstStyle/>
+          <a:p>
+            <a:pPr algn="ctr"/>
+            <a:r>
+              <a:rPr sz="1700" b="1">
+                <a:solidFill>
+                  <a:srgbClr val="1B2A4A"/>
+                </a:solidFill>
+              </a:rPr>
+              <a:t>Итог: </a:t>
+            </a:r>
+            <a:r>
+              <a:rPr sz="1700">
+                <a:solidFill>
+                  <a:srgbClr val="222222"/>
+                </a:solidFill>
+              </a:rPr>
+              <a:t>сокрушение нацизма; 9 Мая — главный праздник воинской славы России.</a:t>
+            </a:r>
+          </a:p>
+        </p:txBody>
+      </p:sp>
+      <p:sp>
+        <p:nvSpPr>
+          <p:cNvPr id="7" name="Rectangle 6"/>
+          <p:cNvSpPr/>
+          <p:nvPr/>
+        </p:nvSpPr>
+        <p:spPr>
+          <a:xfrm>
+            <a:off x="640080" y="4709160"/>
+            <a:ext cx="82296" cy="1325880"/>
+          </a:xfrm>
+          <a:prstGeom prst="rect">
+            <a:avLst/>
+          </a:prstGeom>
+          <a:solidFill>
+            <a:srgbClr val="C9A227"/>
+          </a:solidFill>
+          <a:ln>
+            <a:noFill/>
+          </a:ln>
+        </p:spPr>
+        <p:style>
+          <a:lnRef idx="1">
+            <a:schemeClr val="accent1"/>
+          </a:lnRef>
+          <a:fillRef idx="3">
+            <a:schemeClr val="accent1"/>
+          </a:fillRef>
+          <a:effectRef idx="2">
+            <a:schemeClr val="accent1"/>
+          </a:effectRef>
+          <a:fontRef idx="minor">
+            <a:schemeClr val="lt1"/>
+          </a:fontRef>
+        </p:style>
+        <p:txBody>
+          <a:bodyPr rtlCol="0" anchor="ctr"/>
+          <a:lstStyle/>
+          <a:p>
+            <a:pPr algn="ctr"/>
+          </a:p>
+        </p:txBody>
+      </p:sp>
+      <p:sp>
+        <p:nvSpPr>
+          <p:cNvPr id="8" name="TextBox 7"/>
           <p:cNvSpPr txBox="1"/>
           <p:nvPr/>
         </p:nvSpPr>
@@ -4834,7 +4865,7 @@
       </p:sp>
       <p:sp>
         <p:nvSpPr>
-          <p:cNvPr id="7" name="TextBox 6"/>
+          <p:cNvPr id="9" name="TextBox 8"/>
           <p:cNvSpPr txBox="1"/>
           <p:nvPr/>
         </p:nvSpPr>
@@ -4862,7 +4893,7 @@
               </a:defRPr>
             </a:pPr>
             <a:r>
-              <a:t>10/12</a:t>
+              <a:t>10/11</a:t>
             </a:r>
           </a:p>
         </p:txBody>
@@ -4876,457 +4907,6 @@
 </file>
 
 <file path=ppt/slides/slide11.xml><?xml version="1.0" encoding="utf-8"?>
-<p:sld xmlns:a="http://schemas.openxmlformats.org/drawingml/2006/main" xmlns:p="http://schemas.openxmlformats.org/presentationml/2006/main" xmlns:r="http://schemas.openxmlformats.org/officeDocument/2006/relationships">
-  <p:cSld>
-    <p:bg>
-      <p:bgPr>
-        <a:solidFill>
-          <a:srgbClr val="FFFFFF"/>
-        </a:solidFill>
-        <a:effectLst/>
-      </p:bgPr>
-    </p:bg>
-    <p:spTree>
-      <p:nvGrpSpPr>
-        <p:cNvPr id="1" name=""/>
-        <p:cNvGrpSpPr/>
-        <p:nvPr/>
-      </p:nvGrpSpPr>
-      <p:grpSpPr/>
-      <p:sp>
-        <p:nvSpPr>
-          <p:cNvPr id="2" name="Rectangle 1"/>
-          <p:cNvSpPr/>
-          <p:nvPr/>
-        </p:nvSpPr>
-        <p:spPr>
-          <a:xfrm>
-            <a:off x="0" y="0"/>
-            <a:ext cx="12188952" cy="1417320"/>
-          </a:xfrm>
-          <a:prstGeom prst="rect">
-            <a:avLst/>
-          </a:prstGeom>
-          <a:solidFill>
-            <a:srgbClr val="1B2A4A"/>
-          </a:solidFill>
-          <a:ln>
-            <a:noFill/>
-          </a:ln>
-        </p:spPr>
-        <p:style>
-          <a:lnRef idx="1">
-            <a:schemeClr val="accent1"/>
-          </a:lnRef>
-          <a:fillRef idx="3">
-            <a:schemeClr val="accent1"/>
-          </a:fillRef>
-          <a:effectRef idx="2">
-            <a:schemeClr val="accent1"/>
-          </a:effectRef>
-          <a:fontRef idx="minor">
-            <a:schemeClr val="lt1"/>
-          </a:fontRef>
-        </p:style>
-        <p:txBody>
-          <a:bodyPr rtlCol="0" anchor="ctr"/>
-          <a:lstStyle/>
-          <a:p>
-            <a:pPr algn="ctr"/>
-          </a:p>
-        </p:txBody>
-      </p:sp>
-      <p:sp>
-        <p:nvSpPr>
-          <p:cNvPr id="3" name="Rectangle 2"/>
-          <p:cNvSpPr/>
-          <p:nvPr/>
-        </p:nvSpPr>
-        <p:spPr>
-          <a:xfrm>
-            <a:off x="0" y="1417320"/>
-            <a:ext cx="12188952" cy="64008"/>
-          </a:xfrm>
-          <a:prstGeom prst="rect">
-            <a:avLst/>
-          </a:prstGeom>
-          <a:solidFill>
-            <a:srgbClr val="C9A227"/>
-          </a:solidFill>
-          <a:ln>
-            <a:noFill/>
-          </a:ln>
-        </p:spPr>
-        <p:style>
-          <a:lnRef idx="1">
-            <a:schemeClr val="accent1"/>
-          </a:lnRef>
-          <a:fillRef idx="3">
-            <a:schemeClr val="accent1"/>
-          </a:fillRef>
-          <a:effectRef idx="2">
-            <a:schemeClr val="accent1"/>
-          </a:effectRef>
-          <a:fontRef idx="minor">
-            <a:schemeClr val="lt1"/>
-          </a:fontRef>
-        </p:style>
-        <p:txBody>
-          <a:bodyPr rtlCol="0" anchor="ctr"/>
-          <a:lstStyle/>
-          <a:p>
-            <a:pPr algn="ctr"/>
-          </a:p>
-        </p:txBody>
-      </p:sp>
-      <p:sp>
-        <p:nvSpPr>
-          <p:cNvPr id="4" name="TextBox 3"/>
-          <p:cNvSpPr txBox="1"/>
-          <p:nvPr/>
-        </p:nvSpPr>
-        <p:spPr>
-          <a:xfrm>
-            <a:off x="640080" y="228600"/>
-            <a:ext cx="10881360" cy="1005840"/>
-          </a:xfrm>
-          <a:prstGeom prst="rect">
-            <a:avLst/>
-          </a:prstGeom>
-          <a:noFill/>
-        </p:spPr>
-        <p:txBody>
-          <a:bodyPr wrap="square">
-            <a:spAutoFit/>
-          </a:bodyPr>
-          <a:lstStyle/>
-          <a:p>
-            <a:pPr>
-              <a:defRPr sz="1400" b="1">
-                <a:solidFill>
-                  <a:srgbClr val="C9A227"/>
-                </a:solidFill>
-              </a:defRPr>
-            </a:pPr>
-            <a:r>
-              <a:t>Актуальность  •  ФЗ № 32-ФЗ от 13.03.1995</a:t>
-            </a:r>
-          </a:p>
-          <a:p>
-            <a:pPr>
-              <a:defRPr sz="3000" b="1">
-                <a:solidFill>
-                  <a:srgbClr val="FFFFFF"/>
-                </a:solidFill>
-              </a:defRPr>
-            </a:pPr>
-            <a:r>
-              <a:t>Дни воинской славы: как государство хранит память</a:t>
-            </a:r>
-          </a:p>
-        </p:txBody>
-      </p:sp>
-      <p:sp>
-        <p:nvSpPr>
-          <p:cNvPr id="5" name="TextBox 4"/>
-          <p:cNvSpPr txBox="1"/>
-          <p:nvPr/>
-        </p:nvSpPr>
-        <p:spPr>
-          <a:xfrm>
-            <a:off x="640080" y="1920240"/>
-            <a:ext cx="6949440" cy="4023360"/>
-          </a:xfrm>
-          <a:prstGeom prst="rect">
-            <a:avLst/>
-          </a:prstGeom>
-          <a:noFill/>
-        </p:spPr>
-        <p:txBody>
-          <a:bodyPr wrap="square">
-            <a:spAutoFit/>
-          </a:bodyPr>
-          <a:lstStyle/>
-          <a:p>
-            <a:pPr>
-              <a:spcAft>
-                <a:spcPts val="800"/>
-              </a:spcAft>
-            </a:pPr>
-            <a:r>
-              <a:rPr sz="1700" b="1">
-                <a:solidFill>
-                  <a:srgbClr val="1B2A4A"/>
-                </a:solidFill>
-              </a:rPr>
-              <a:t>18 апреля — </a:t>
-            </a:r>
-            <a:r>
-              <a:rPr sz="1700">
-                <a:solidFill>
-                  <a:srgbClr val="222222"/>
-                </a:solidFill>
-              </a:rPr>
-              <a:t>Ледовое побоище (1242).</a:t>
-            </a:r>
-          </a:p>
-          <a:p>
-            <a:pPr>
-              <a:spcAft>
-                <a:spcPts val="800"/>
-              </a:spcAft>
-            </a:pPr>
-            <a:r>
-              <a:rPr sz="1700" b="1">
-                <a:solidFill>
-                  <a:srgbClr val="1B2A4A"/>
-                </a:solidFill>
-              </a:rPr>
-              <a:t>21 сентября — </a:t>
-            </a:r>
-            <a:r>
-              <a:rPr sz="1700">
-                <a:solidFill>
-                  <a:srgbClr val="222222"/>
-                </a:solidFill>
-              </a:rPr>
-              <a:t>Куликовская битва (1380).</a:t>
-            </a:r>
-          </a:p>
-          <a:p>
-            <a:pPr>
-              <a:spcAft>
-                <a:spcPts val="800"/>
-              </a:spcAft>
-            </a:pPr>
-            <a:r>
-              <a:rPr sz="1700" b="1">
-                <a:solidFill>
-                  <a:srgbClr val="1B2A4A"/>
-                </a:solidFill>
-              </a:rPr>
-              <a:t>4 ноября — </a:t>
-            </a:r>
-            <a:r>
-              <a:rPr sz="1700">
-                <a:solidFill>
-                  <a:srgbClr val="222222"/>
-                </a:solidFill>
-              </a:rPr>
-              <a:t>освобождение Москвы (1612), День народного единства.</a:t>
-            </a:r>
-          </a:p>
-          <a:p>
-            <a:pPr>
-              <a:spcAft>
-                <a:spcPts val="800"/>
-              </a:spcAft>
-            </a:pPr>
-            <a:r>
-              <a:rPr sz="1700" b="1">
-                <a:solidFill>
-                  <a:srgbClr val="1B2A4A"/>
-                </a:solidFill>
-              </a:rPr>
-              <a:t>10 июля — </a:t>
-            </a:r>
-            <a:r>
-              <a:rPr sz="1700">
-                <a:solidFill>
-                  <a:srgbClr val="222222"/>
-                </a:solidFill>
-              </a:rPr>
-              <a:t>Полтава (1709).    8 сентября — Бородино (1812).</a:t>
-            </a:r>
-          </a:p>
-          <a:p>
-            <a:pPr>
-              <a:spcAft>
-                <a:spcPts val="800"/>
-              </a:spcAft>
-            </a:pPr>
-            <a:r>
-              <a:rPr sz="1700" b="1">
-                <a:solidFill>
-                  <a:srgbClr val="1B2A4A"/>
-                </a:solidFill>
-              </a:rPr>
-              <a:t>2 февраля — </a:t>
-            </a:r>
-            <a:r>
-              <a:rPr sz="1700">
-                <a:solidFill>
-                  <a:srgbClr val="222222"/>
-                </a:solidFill>
-              </a:rPr>
-              <a:t>Сталинград (1943).    23 августа — Курск (1943).</a:t>
-            </a:r>
-          </a:p>
-          <a:p>
-            <a:pPr>
-              <a:spcAft>
-                <a:spcPts val="800"/>
-              </a:spcAft>
-            </a:pPr>
-            <a:r>
-              <a:rPr sz="1700" b="1">
-                <a:solidFill>
-                  <a:srgbClr val="1B2A4A"/>
-                </a:solidFill>
-              </a:rPr>
-              <a:t>9 мая — </a:t>
-            </a:r>
-            <a:r>
-              <a:rPr sz="1700">
-                <a:solidFill>
-                  <a:srgbClr val="222222"/>
-                </a:solidFill>
-              </a:rPr>
-              <a:t>День Победы (1945).</a:t>
-            </a:r>
-          </a:p>
-        </p:txBody>
-      </p:sp>
-      <p:sp>
-        <p:nvSpPr>
-          <p:cNvPr id="6" name="Rectangle 5"/>
-          <p:cNvSpPr/>
-          <p:nvPr/>
-        </p:nvSpPr>
-        <p:spPr>
-          <a:xfrm>
-            <a:off x="7955279" y="1920240"/>
-            <a:ext cx="3566160" cy="4023360"/>
-          </a:xfrm>
-          <a:prstGeom prst="rect">
-            <a:avLst/>
-          </a:prstGeom>
-          <a:solidFill>
-            <a:srgbClr val="F1ECDF"/>
-          </a:solidFill>
-          <a:ln>
-            <a:noFill/>
-          </a:ln>
-        </p:spPr>
-        <p:style>
-          <a:lnRef idx="1">
-            <a:schemeClr val="accent1"/>
-          </a:lnRef>
-          <a:fillRef idx="3">
-            <a:schemeClr val="accent1"/>
-          </a:fillRef>
-          <a:effectRef idx="2">
-            <a:schemeClr val="accent1"/>
-          </a:effectRef>
-          <a:fontRef idx="minor">
-            <a:schemeClr val="lt1"/>
-          </a:fontRef>
-        </p:style>
-        <p:txBody>
-          <a:bodyPr rtlCol="0" anchor="ctr" wrap="square" lIns="228600" rIns="228600"/>
-          <a:lstStyle/>
-          <a:p>
-            <a:pPr algn="ctr"/>
-            <a:r>
-              <a:rPr sz="1800" b="1">
-                <a:solidFill>
-                  <a:srgbClr val="1B2A4A"/>
-                </a:solidFill>
-              </a:rPr>
-              <a:t>Почему это актуально
-</a:t>
-            </a:r>
-            <a:r>
-              <a:rPr sz="1600">
-                <a:solidFill>
-                  <a:srgbClr val="222222"/>
-                </a:solidFill>
-              </a:rPr>
-              <a:t>
-Закон действующий, даты проверены на 2026 год. Государство закрепляет победы в календаре — это и есть политика исторической памяти.</a:t>
-            </a:r>
-          </a:p>
-        </p:txBody>
-      </p:sp>
-      <p:sp>
-        <p:nvSpPr>
-          <p:cNvPr id="7" name="TextBox 6"/>
-          <p:cNvSpPr txBox="1"/>
-          <p:nvPr/>
-        </p:nvSpPr>
-        <p:spPr>
-          <a:xfrm>
-            <a:off x="548640" y="6355080"/>
-            <a:ext cx="10058400" cy="320040"/>
-          </a:xfrm>
-          <a:prstGeom prst="rect">
-            <a:avLst/>
-          </a:prstGeom>
-          <a:noFill/>
-        </p:spPr>
-        <p:txBody>
-          <a:bodyPr wrap="square">
-            <a:spAutoFit/>
-          </a:bodyPr>
-          <a:lstStyle/>
-          <a:p>
-            <a:pPr algn="l">
-              <a:defRPr sz="1100" b="0">
-                <a:solidFill>
-                  <a:srgbClr val="6B7280"/>
-                </a:solidFill>
-              </a:defRPr>
-            </a:pPr>
-            <a:r>
-              <a:t>Основы российской государственности  •  Ключевые военные победы России</a:t>
-            </a:r>
-          </a:p>
-        </p:txBody>
-      </p:sp>
-      <p:sp>
-        <p:nvSpPr>
-          <p:cNvPr id="8" name="TextBox 7"/>
-          <p:cNvSpPr txBox="1"/>
-          <p:nvPr/>
-        </p:nvSpPr>
-        <p:spPr>
-          <a:xfrm>
-            <a:off x="11064240" y="6355080"/>
-            <a:ext cx="640080" cy="320040"/>
-          </a:xfrm>
-          <a:prstGeom prst="rect">
-            <a:avLst/>
-          </a:prstGeom>
-          <a:noFill/>
-        </p:spPr>
-        <p:txBody>
-          <a:bodyPr wrap="square">
-            <a:spAutoFit/>
-          </a:bodyPr>
-          <a:lstStyle/>
-          <a:p>
-            <a:pPr algn="r">
-              <a:defRPr sz="1100" b="0">
-                <a:solidFill>
-                  <a:srgbClr val="6B7280"/>
-                </a:solidFill>
-              </a:defRPr>
-            </a:pPr>
-            <a:r>
-              <a:t>11/12</a:t>
-            </a:r>
-          </a:p>
-        </p:txBody>
-      </p:sp>
-    </p:spTree>
-  </p:cSld>
-  <p:clrMapOvr>
-    <a:masterClrMapping/>
-  </p:clrMapOvr>
-</p:sld>
-</file>
-
-<file path=ppt/slides/slide12.xml><?xml version="1.0" encoding="utf-8"?>
 <p:sld xmlns:a="http://schemas.openxmlformats.org/drawingml/2006/main" xmlns:p="http://schemas.openxmlformats.org/presentationml/2006/main" xmlns:r="http://schemas.openxmlformats.org/officeDocument/2006/relationships">
   <p:cSld>
     <p:bg>
@@ -5431,7 +5011,7 @@
         <p:spPr>
           <a:xfrm>
             <a:off x="640080" y="1920240"/>
-            <a:ext cx="10881360" cy="2011680"/>
+            <a:ext cx="10881360" cy="1828800"/>
           </a:xfrm>
           <a:prstGeom prst="rect">
             <a:avLst/>
@@ -5452,7 +5032,7 @@
               </a:defRPr>
             </a:pPr>
             <a:r>
-              <a:t>Военные победы России — это вехи сохранения российской государственности: суверенитета, единства и независимости — от Чудского озера до Берлина.</a:t>
+              <a:t>Семь побед — от Чудского озера до Берлина: каждая начиналась с обороны и заканчивалась переломом истории. Их помнит вся страна — даты закреплены в законе о днях воинской славы.</a:t>
             </a:r>
           </a:p>
         </p:txBody>
@@ -5465,7 +5045,7 @@
         </p:nvSpPr>
         <p:spPr>
           <a:xfrm>
-            <a:off x="640080" y="3931920"/>
+            <a:off x="640080" y="4023360"/>
             <a:ext cx="10881360" cy="2011680"/>
           </a:xfrm>
           <a:prstGeom prst="rect">
@@ -5487,7 +5067,7 @@
               </a:defRPr>
             </a:pPr>
             <a:r>
-              <a:t>Источники: ФЗ № 32-ФЗ «О днях воинской славы»; Большая российская энциклопедия; Президентская библиотека им. Ельцина; Российская газета; материалы РВИО. Все даты сверены минимум по двум источникам.</a:t>
+              <a:t>Источники: ФЗ № 32-ФЗ «О днях воинской славы»; Большая российская энциклопедия; Президентская библиотека им. Ельцина; Российская газета; материалы РВИО.</a:t>
             </a:r>
           </a:p>
           <a:p>
@@ -5646,7 +5226,7 @@
               </a:defRPr>
             </a:pPr>
             <a:r>
-              <a:t>Введение</a:t>
+              <a:t>1242–1945  •  семь веков</a:t>
             </a:r>
           </a:p>
           <a:p>
@@ -5658,7 +5238,7 @@
               </a:defRPr>
             </a:pPr>
             <a:r>
-              <a:t>Почему победы — это про государственность?</a:t>
+              <a:t>Семь побед — план доклада</a:t>
             </a:r>
           </a:p>
         </p:txBody>
@@ -5671,8 +5251,8 @@
         </p:nvSpPr>
         <p:spPr>
           <a:xfrm>
-            <a:off x="640080" y="1920240"/>
-            <a:ext cx="6949440" cy="4023360"/>
+            <a:off x="640080" y="1828800"/>
+            <a:ext cx="10881360" cy="4206240"/>
           </a:xfrm>
           <a:prstGeom prst="rect">
             <a:avLst/>
@@ -5687,161 +5267,169 @@
           <a:p>
             <a:pPr>
               <a:spcAft>
-                <a:spcPts val="800"/>
+                <a:spcPts val="1000"/>
               </a:spcAft>
             </a:pPr>
             <a:r>
-              <a:rPr sz="1800" b="1">
+              <a:rPr sz="1900" b="1">
                 <a:solidFill>
                   <a:srgbClr val="1B2A4A"/>
                 </a:solidFill>
               </a:rPr>
-              <a:t>Суверенитет. </a:t>
-            </a:r>
-            <a:r>
-              <a:rPr sz="1800">
+              <a:t>1. Ледовое побоище, 1242 — </a:t>
+            </a:r>
+            <a:r>
+              <a:rPr sz="1900">
                 <a:solidFill>
                   <a:srgbClr val="222222"/>
                 </a:solidFill>
               </a:rPr>
-              <a:t>Каждая победа — отстоявшая независимость: от крестоносцев, Орды, поляков, шведов, французов, нацистов.</a:t>
+              <a:t>Александр Невский громит рыцарей на Чудском озере.</a:t>
             </a:r>
           </a:p>
           <a:p>
             <a:pPr>
               <a:spcAft>
-                <a:spcPts val="800"/>
+                <a:spcPts val="1000"/>
               </a:spcAft>
             </a:pPr>
             <a:r>
-              <a:rPr sz="1800" b="1">
+              <a:rPr sz="1900" b="1">
                 <a:solidFill>
                   <a:srgbClr val="1B2A4A"/>
                 </a:solidFill>
               </a:rPr>
-              <a:t>Единство. </a:t>
-            </a:r>
-            <a:r>
-              <a:rPr sz="1800">
+              <a:t>2. Куликовская битва, 1380 — </a:t>
+            </a:r>
+            <a:r>
+              <a:rPr sz="1900">
                 <a:solidFill>
                   <a:srgbClr val="222222"/>
                 </a:solidFill>
               </a:rPr>
-              <a:t>Куликово поле, ополчение 1612-го, народная война 1812 и 1941 годов — победы всего народа, а не только армии.</a:t>
+              <a:t>Дмитрий Донской бьёт войско Мамая.</a:t>
             </a:r>
           </a:p>
           <a:p>
             <a:pPr>
               <a:spcAft>
-                <a:spcPts val="800"/>
+                <a:spcPts val="1000"/>
               </a:spcAft>
             </a:pPr>
             <a:r>
-              <a:rPr sz="1800" b="1">
+              <a:rPr sz="1900" b="1">
                 <a:solidFill>
                   <a:srgbClr val="1B2A4A"/>
                 </a:solidFill>
               </a:rPr>
-              <a:t>Преемственность. </a:t>
-            </a:r>
-            <a:r>
-              <a:rPr sz="1800">
+              <a:t>3. Освобождение Москвы, 1612 — </a:t>
+            </a:r>
+            <a:r>
+              <a:rPr sz="1900">
                 <a:solidFill>
                   <a:srgbClr val="222222"/>
                 </a:solidFill>
               </a:rPr>
-              <a:t>От Руси через империю к современной России — непрерывная линия защиты Отечества.</a:t>
+              <a:t>ополчение Минина и Пожарского выбивает поляков из Кремля.</a:t>
             </a:r>
           </a:p>
           <a:p>
             <a:pPr>
               <a:spcAft>
-                <a:spcPts val="800"/>
+                <a:spcPts val="1000"/>
               </a:spcAft>
             </a:pPr>
             <a:r>
-              <a:rPr sz="1800" b="1">
+              <a:rPr sz="1900" b="1">
                 <a:solidFill>
                   <a:srgbClr val="1B2A4A"/>
                 </a:solidFill>
               </a:rPr>
-              <a:t>Ценности. </a:t>
-            </a:r>
-            <a:r>
-              <a:rPr sz="1800">
+              <a:t>4. Полтавская битва, 1709 — </a:t>
+            </a:r>
+            <a:r>
+              <a:rPr sz="1900">
                 <a:solidFill>
                   <a:srgbClr val="222222"/>
                 </a:solidFill>
               </a:rPr>
-              <a:t>Служение, самопожертвование, единство — то, что курс называет традиционными ценностями.</a:t>
-            </a:r>
-          </a:p>
-        </p:txBody>
-      </p:sp>
-      <p:sp>
-        <p:nvSpPr>
-          <p:cNvPr id="6" name="Rectangle 5"/>
-          <p:cNvSpPr/>
-          <p:nvPr/>
-        </p:nvSpPr>
-        <p:spPr>
-          <a:xfrm>
-            <a:off x="7955279" y="1920240"/>
-            <a:ext cx="3566160" cy="4023360"/>
-          </a:xfrm>
-          <a:prstGeom prst="rect">
-            <a:avLst/>
-          </a:prstGeom>
-          <a:solidFill>
-            <a:srgbClr val="F1ECDF"/>
-          </a:solidFill>
-          <a:ln>
-            <a:noFill/>
-          </a:ln>
-        </p:spPr>
-        <p:style>
-          <a:lnRef idx="1">
-            <a:schemeClr val="accent1"/>
-          </a:lnRef>
-          <a:fillRef idx="3">
-            <a:schemeClr val="accent1"/>
-          </a:fillRef>
-          <a:effectRef idx="2">
-            <a:schemeClr val="accent1"/>
-          </a:effectRef>
-          <a:fontRef idx="minor">
-            <a:schemeClr val="lt1"/>
-          </a:fontRef>
-        </p:style>
-        <p:txBody>
-          <a:bodyPr rtlCol="0" anchor="ctr" wrap="square" lIns="228600" rIns="228600"/>
-          <a:lstStyle/>
-          <a:p>
-            <a:pPr algn="l"/>
-            <a:r>
-              <a:rPr sz="1800" b="1">
+              <a:t>Пётр I уничтожает армию Карла XII.</a:t>
+            </a:r>
+          </a:p>
+          <a:p>
+            <a:pPr>
+              <a:spcAft>
+                <a:spcPts val="1000"/>
+              </a:spcAft>
+            </a:pPr>
+            <a:r>
+              <a:rPr sz="1900" b="1">
                 <a:solidFill>
                   <a:srgbClr val="1B2A4A"/>
                 </a:solidFill>
               </a:rPr>
-              <a:t>Тезис доклада
-</a:t>
-            </a:r>
-            <a:r>
-              <a:rPr sz="1700">
+              <a:t>5. Бородино и 1812 год — </a:t>
+            </a:r>
+            <a:r>
+              <a:rPr sz="1900">
                 <a:solidFill>
                   <a:srgbClr val="222222"/>
                 </a:solidFill>
               </a:rPr>
-              <a:t>
-Военные победы России — это вехи становления и сохранения российской государственности.</a:t>
-            </a:r>
-          </a:p>
-        </p:txBody>
-      </p:sp>
-      <p:sp>
-        <p:nvSpPr>
-          <p:cNvPr id="7" name="TextBox 6"/>
+              <a:t>Кутузов и гибель «Великой армии» Наполеона.</a:t>
+            </a:r>
+          </a:p>
+          <a:p>
+            <a:pPr>
+              <a:spcAft>
+                <a:spcPts val="1000"/>
+              </a:spcAft>
+            </a:pPr>
+            <a:r>
+              <a:rPr sz="1900" b="1">
+                <a:solidFill>
+                  <a:srgbClr val="1B2A4A"/>
+                </a:solidFill>
+              </a:rPr>
+              <a:t>6. Сталинград и Курск, 1943 — </a:t>
+            </a:r>
+            <a:r>
+              <a:rPr sz="1900">
+                <a:solidFill>
+                  <a:srgbClr val="222222"/>
+                </a:solidFill>
+              </a:rPr>
+              <a:t>коренной перелом Великой Отечественной.</a:t>
+            </a:r>
+          </a:p>
+          <a:p>
+            <a:pPr>
+              <a:spcAft>
+                <a:spcPts val="1000"/>
+              </a:spcAft>
+            </a:pPr>
+            <a:r>
+              <a:rPr sz="1900" b="1">
+                <a:solidFill>
+                  <a:srgbClr val="1B2A4A"/>
+                </a:solidFill>
+              </a:rPr>
+              <a:t>7. Взятие Берлина, 1945 — </a:t>
+            </a:r>
+            <a:r>
+              <a:rPr sz="1900">
+                <a:solidFill>
+                  <a:srgbClr val="222222"/>
+                </a:solidFill>
+              </a:rPr>
+              <a:t>Победа 9 Мая.</a:t>
+            </a:r>
+          </a:p>
+        </p:txBody>
+      </p:sp>
+      <p:sp>
+        <p:nvSpPr>
+          <p:cNvPr id="6" name="TextBox 5"/>
           <p:cNvSpPr txBox="1"/>
           <p:nvPr/>
         </p:nvSpPr>
@@ -5876,7 +5464,7 @@
       </p:sp>
       <p:sp>
         <p:nvSpPr>
-          <p:cNvPr id="8" name="TextBox 7"/>
+          <p:cNvPr id="7" name="TextBox 6"/>
           <p:cNvSpPr txBox="1"/>
           <p:nvPr/>
         </p:nvSpPr>
@@ -5904,7 +5492,7 @@
               </a:defRPr>
             </a:pPr>
             <a:r>
-              <a:t>2/12</a:t>
+              <a:t>2/11</a:t>
             </a:r>
           </a:p>
         </p:txBody>
@@ -6051,7 +5639,7 @@
               </a:defRPr>
             </a:pPr>
             <a:r>
-              <a:t>1242  •  Александр Невский</a:t>
+              <a:t>5 апреля 1242  •  Чудское озеро  •  Александр Невский</a:t>
             </a:r>
           </a:p>
           <a:p>
@@ -6076,8 +5664,8 @@
         </p:nvSpPr>
         <p:spPr>
           <a:xfrm>
-            <a:off x="640080" y="1920240"/>
-            <a:ext cx="10881360" cy="2651760"/>
+            <a:off x="640080" y="1783080"/>
+            <a:ext cx="10881360" cy="2834640"/>
           </a:xfrm>
           <a:prstGeom prst="rect">
             <a:avLst/>
@@ -6092,70 +5680,116 @@
           <a:p>
             <a:pPr>
               <a:spcAft>
-                <a:spcPts val="800"/>
+                <a:spcPts val="600"/>
               </a:spcAft>
             </a:pPr>
             <a:r>
-              <a:rPr sz="1900" b="1">
+              <a:rPr sz="1700" b="1">
                 <a:solidFill>
                   <a:srgbClr val="1B2A4A"/>
                 </a:solidFill>
               </a:rPr>
-              <a:t>Противник: </a:t>
-            </a:r>
-            <a:r>
-              <a:rPr sz="1900">
+              <a:t>Кто с кем: </a:t>
+            </a:r>
+            <a:r>
+              <a:rPr sz="1700">
                 <a:solidFill>
                   <a:srgbClr val="222222"/>
                 </a:solidFill>
               </a:rPr>
-              <a:t>рыцари Ливонского ордена на Чудском озере.</a:t>
+              <a:t>войско Новгорода и Владимира против рыцарей Ливонского ордена.</a:t>
             </a:r>
           </a:p>
           <a:p>
             <a:pPr>
               <a:spcAft>
-                <a:spcPts val="800"/>
+                <a:spcPts val="600"/>
               </a:spcAft>
             </a:pPr>
             <a:r>
-              <a:rPr sz="1900" b="1">
+              <a:rPr sz="1700" b="1">
                 <a:solidFill>
                   <a:srgbClr val="1B2A4A"/>
                 </a:solidFill>
               </a:rPr>
-              <a:t>Что было: </a:t>
-            </a:r>
-            <a:r>
-              <a:rPr sz="1900">
+              <a:t>Силы: </a:t>
+            </a:r>
+            <a:r>
+              <a:rPr sz="1700">
                 <a:solidFill>
                   <a:srgbClr val="222222"/>
                 </a:solidFill>
               </a:rPr>
-              <a:t>окружение и разгром рыцарского войска; день славы — 18 апреля.</a:t>
+              <a:t>по оценкам историков — несколько тысяч с каждой стороны, точных цифр нет.</a:t>
             </a:r>
           </a:p>
           <a:p>
             <a:pPr>
               <a:spcAft>
-                <a:spcPts val="800"/>
+                <a:spcPts val="600"/>
               </a:spcAft>
             </a:pPr>
             <a:r>
-              <a:rPr sz="1900" b="1">
+              <a:rPr sz="1700" b="1">
                 <a:solidFill>
                   <a:srgbClr val="1B2A4A"/>
                 </a:solidFill>
               </a:rPr>
-              <a:t>Итог: </a:t>
-            </a:r>
-            <a:r>
-              <a:rPr sz="1900">
+              <a:t>Ход боя: </a:t>
+            </a:r>
+            <a:r>
+              <a:rPr sz="1700">
                 <a:solidFill>
                   <a:srgbClr val="222222"/>
                 </a:solidFill>
               </a:rPr>
-              <a:t>остановлена экспансия крестоносцев на восток.</a:t>
+              <a:t>русские заманили рыцарскую «свинью» в центр, затем ударили с флангов и окружили её на льду.</a:t>
+            </a:r>
+          </a:p>
+          <a:p>
+            <a:pPr>
+              <a:spcAft>
+                <a:spcPts val="600"/>
+              </a:spcAft>
+            </a:pPr>
+            <a:r>
+              <a:rPr sz="1700" b="1">
+                <a:solidFill>
+                  <a:srgbClr val="1B2A4A"/>
+                </a:solidFill>
+              </a:rPr>
+              <a:t>Потери врага: </a:t>
+            </a:r>
+            <a:r>
+              <a:rPr sz="1700">
+                <a:solidFill>
+                  <a:srgbClr val="222222"/>
+                </a:solidFill>
+              </a:rPr>
+              <a:t>летописи говорят о сотнях погибших рыцарей и пленении части войска.</a:t>
+            </a:r>
+          </a:p>
+          <a:p>
+            <a:pPr>
+              <a:spcAft>
+                <a:spcPts val="600"/>
+              </a:spcAft>
+            </a:pPr>
+            <a:r>
+              <a:rPr sz="1700" b="1">
+                <a:solidFill>
+                  <a:srgbClr val="1B2A4A"/>
+                </a:solidFill>
+              </a:rPr>
+              <a:t>Сразу после: </a:t>
+            </a:r>
+            <a:r>
+              <a:rPr sz="1700">
+                <a:solidFill>
+                  <a:srgbClr val="222222"/>
+                </a:solidFill>
+              </a:rPr>
+              <a:t>Орден запросил мир и отказался от претензий на Псков и Новгород.</a:t>
             </a:r>
           </a:p>
         </p:txBody>
@@ -6168,8 +5802,8 @@
         </p:nvSpPr>
         <p:spPr>
           <a:xfrm>
-            <a:off x="640080" y="4617720"/>
-            <a:ext cx="10881360" cy="1417320"/>
+            <a:off x="640080" y="4709160"/>
+            <a:ext cx="10881360" cy="1325880"/>
           </a:xfrm>
           <a:prstGeom prst="rect">
             <a:avLst/>
@@ -6201,20 +5835,20 @@
           <a:p>
             <a:pPr algn="ctr"/>
             <a:r>
-              <a:rPr sz="1800" b="1">
+              <a:rPr sz="1700" b="1">
                 <a:solidFill>
                   <a:srgbClr val="1B2A4A"/>
                 </a:solidFill>
               </a:rPr>
-              <a:t>Значение для государственности: </a:t>
-            </a:r>
-            <a:r>
-              <a:rPr sz="1800">
+              <a:t>Итог: </a:t>
+            </a:r>
+            <a:r>
+              <a:rPr sz="1700">
                 <a:solidFill>
                   <a:srgbClr val="222222"/>
                 </a:solidFill>
               </a:rPr>
-              <a:t>Для государственности: Русь сохранила северо-запад, веру и независимость Новгорода и Пскова.</a:t>
+              <a:t>разгром крестоносцев, Русь отстояла северо-запад; день воинской славы — 18 апреля.</a:t>
             </a:r>
           </a:p>
         </p:txBody>
@@ -6227,8 +5861,8 @@
         </p:nvSpPr>
         <p:spPr>
           <a:xfrm>
-            <a:off x="640080" y="4617720"/>
-            <a:ext cx="82296" cy="1417320"/>
+            <a:off x="640080" y="4709160"/>
+            <a:ext cx="82296" cy="1325880"/>
           </a:xfrm>
           <a:prstGeom prst="rect">
             <a:avLst/>
@@ -6327,7 +5961,7 @@
               </a:defRPr>
             </a:pPr>
             <a:r>
-              <a:t>3/12</a:t>
+              <a:t>3/11</a:t>
             </a:r>
           </a:p>
         </p:txBody>
@@ -6474,7 +6108,7 @@
               </a:defRPr>
             </a:pPr>
             <a:r>
-              <a:t>1380  •  Дмитрий Донской</a:t>
+              <a:t>8 сентября 1380  •  Куликово поле, у Дона  •  Дмитрий Донской</a:t>
             </a:r>
           </a:p>
           <a:p>
@@ -6499,8 +6133,8 @@
         </p:nvSpPr>
         <p:spPr>
           <a:xfrm>
-            <a:off x="640080" y="1920240"/>
-            <a:ext cx="10881360" cy="2651760"/>
+            <a:off x="640080" y="1783080"/>
+            <a:ext cx="10881360" cy="2834640"/>
           </a:xfrm>
           <a:prstGeom prst="rect">
             <a:avLst/>
@@ -6515,70 +6149,116 @@
           <a:p>
             <a:pPr>
               <a:spcAft>
-                <a:spcPts val="800"/>
+                <a:spcPts val="600"/>
               </a:spcAft>
             </a:pPr>
             <a:r>
-              <a:rPr sz="1900" b="1">
+              <a:rPr sz="1700" b="1">
                 <a:solidFill>
                   <a:srgbClr val="1B2A4A"/>
                 </a:solidFill>
               </a:rPr>
-              <a:t>Противник: </a:t>
-            </a:r>
-            <a:r>
-              <a:rPr sz="1900">
+              <a:t>Кто с кем: </a:t>
+            </a:r>
+            <a:r>
+              <a:rPr sz="1700">
                 <a:solidFill>
                   <a:srgbClr val="222222"/>
                 </a:solidFill>
               </a:rPr>
-              <a:t>войско хана Мамая на Куликовом поле.</a:t>
+              <a:t>полки Москвы и союзных княжеств против войска хана Мамая.</a:t>
             </a:r>
           </a:p>
           <a:p>
             <a:pPr>
               <a:spcAft>
-                <a:spcPts val="800"/>
+                <a:spcPts val="600"/>
               </a:spcAft>
             </a:pPr>
             <a:r>
-              <a:rPr sz="1900" b="1">
+              <a:rPr sz="1700" b="1">
                 <a:solidFill>
                   <a:srgbClr val="1B2A4A"/>
                 </a:solidFill>
               </a:rPr>
-              <a:t>Что было: </a:t>
-            </a:r>
-            <a:r>
-              <a:rPr sz="1900">
+              <a:t>Силы: </a:t>
+            </a:r>
+            <a:r>
+              <a:rPr sz="1700">
                 <a:solidFill>
                   <a:srgbClr val="222222"/>
                 </a:solidFill>
               </a:rPr>
-              <a:t>решающий удар засадного полка; день славы — 21 сентября.</a:t>
+              <a:t>оценки — от 40 до 70 тыс. русских против 90–150 тыс. ордынских (цифры спорны).</a:t>
             </a:r>
           </a:p>
           <a:p>
             <a:pPr>
               <a:spcAft>
-                <a:spcPts val="800"/>
+                <a:spcPts val="600"/>
               </a:spcAft>
             </a:pPr>
             <a:r>
-              <a:rPr sz="1900" b="1">
+              <a:rPr sz="1700" b="1">
                 <a:solidFill>
                   <a:srgbClr val="1B2A4A"/>
                 </a:solidFill>
               </a:rPr>
-              <a:t>Итог: </a:t>
-            </a:r>
-            <a:r>
-              <a:rPr sz="1900">
+              <a:t>Ход боя: </a:t>
+            </a:r>
+            <a:r>
+              <a:rPr sz="1700">
                 <a:solidFill>
                   <a:srgbClr val="222222"/>
                 </a:solidFill>
               </a:rPr>
-              <a:t>первая крупная победа объединённого русского войска над Ордой.</a:t>
+              <a:t>тяжёлая сеча в центре; в решающий момент ударил засадный полк Боброка — Орда побежала.</a:t>
+            </a:r>
+          </a:p>
+          <a:p>
+            <a:pPr>
+              <a:spcAft>
+                <a:spcPts val="600"/>
+              </a:spcAft>
+            </a:pPr>
+            <a:r>
+              <a:rPr sz="1700" b="1">
+                <a:solidFill>
+                  <a:srgbClr val="1B2A4A"/>
+                </a:solidFill>
+              </a:rPr>
+              <a:t>Цена: </a:t>
+            </a:r>
+            <a:r>
+              <a:rPr sz="1700">
+                <a:solidFill>
+                  <a:srgbClr val="222222"/>
+                </a:solidFill>
+              </a:rPr>
+              <a:t>потери русских огромны, летописи пишут о гибели множества воевод и воинов.</a:t>
+            </a:r>
+          </a:p>
+          <a:p>
+            <a:pPr>
+              <a:spcAft>
+                <a:spcPts val="600"/>
+              </a:spcAft>
+            </a:pPr>
+            <a:r>
+              <a:rPr sz="1700" b="1">
+                <a:solidFill>
+                  <a:srgbClr val="1B2A4A"/>
+                </a:solidFill>
+              </a:rPr>
+              <a:t>Сразу после: </a:t>
+            </a:r>
+            <a:r>
+              <a:rPr sz="1700">
+                <a:solidFill>
+                  <a:srgbClr val="222222"/>
+                </a:solidFill>
+              </a:rPr>
+              <a:t>Мамай бежал и вскоре погиб; иго продолжится ещё 100 лет, но страх перед Ордой сломан.</a:t>
             </a:r>
           </a:p>
         </p:txBody>
@@ -6591,8 +6271,8 @@
         </p:nvSpPr>
         <p:spPr>
           <a:xfrm>
-            <a:off x="640080" y="4617720"/>
-            <a:ext cx="10881360" cy="1417320"/>
+            <a:off x="640080" y="4709160"/>
+            <a:ext cx="10881360" cy="1325880"/>
           </a:xfrm>
           <a:prstGeom prst="rect">
             <a:avLst/>
@@ -6624,20 +6304,20 @@
           <a:p>
             <a:pPr algn="ctr"/>
             <a:r>
-              <a:rPr sz="1800" b="1">
+              <a:rPr sz="1700" b="1">
                 <a:solidFill>
                   <a:srgbClr val="1B2A4A"/>
                 </a:solidFill>
               </a:rPr>
-              <a:t>Значение для государственности: </a:t>
-            </a:r>
-            <a:r>
-              <a:rPr sz="1800">
+              <a:t>Итог: </a:t>
+            </a:r>
+            <a:r>
+              <a:rPr sz="1700">
                 <a:solidFill>
                   <a:srgbClr val="222222"/>
                 </a:solidFill>
               </a:rPr>
-              <a:t>Для государственности: разрушен миф о непобедимости Орды, начало единства русских земель вокруг Москвы.</a:t>
+              <a:t>первая победа объединённого русского войска над главными силами Орды; день славы — 21 сентября.</a:t>
             </a:r>
           </a:p>
         </p:txBody>
@@ -6650,8 +6330,8 @@
         </p:nvSpPr>
         <p:spPr>
           <a:xfrm>
-            <a:off x="640080" y="4617720"/>
-            <a:ext cx="82296" cy="1417320"/>
+            <a:off x="640080" y="4709160"/>
+            <a:ext cx="82296" cy="1325880"/>
           </a:xfrm>
           <a:prstGeom prst="rect">
             <a:avLst/>
@@ -6750,7 +6430,7 @@
               </a:defRPr>
             </a:pPr>
             <a:r>
-              <a:t>4/12</a:t>
+              <a:t>4/11</a:t>
             </a:r>
           </a:p>
         </p:txBody>
@@ -6897,7 +6577,7 @@
               </a:defRPr>
             </a:pPr>
             <a:r>
-              <a:t>1612  •  Минин и Пожарский</a:t>
+              <a:t>Август — октябрь 1612  •  Минин и Пожарский</a:t>
             </a:r>
           </a:p>
           <a:p>
@@ -6922,8 +6602,8 @@
         </p:nvSpPr>
         <p:spPr>
           <a:xfrm>
-            <a:off x="640080" y="1920240"/>
-            <a:ext cx="10881360" cy="2651760"/>
+            <a:off x="640080" y="1783080"/>
+            <a:ext cx="10881360" cy="2834640"/>
           </a:xfrm>
           <a:prstGeom prst="rect">
             <a:avLst/>
@@ -6938,70 +6618,116 @@
           <a:p>
             <a:pPr>
               <a:spcAft>
-                <a:spcPts val="800"/>
+                <a:spcPts val="600"/>
               </a:spcAft>
             </a:pPr>
             <a:r>
-              <a:rPr sz="1900" b="1">
+              <a:rPr sz="1700" b="1">
                 <a:solidFill>
                   <a:srgbClr val="1B2A4A"/>
                 </a:solidFill>
               </a:rPr>
-              <a:t>Противник: </a:t>
-            </a:r>
-            <a:r>
-              <a:rPr sz="1900">
+              <a:t>Кто с кем: </a:t>
+            </a:r>
+            <a:r>
+              <a:rPr sz="1700">
                 <a:solidFill>
                   <a:srgbClr val="222222"/>
                 </a:solidFill>
               </a:rPr>
-              <a:t>польский гарнизон в Кремле, войско гетмана Ходкевича.</a:t>
+              <a:t>Второе народное ополчение против польского гарнизона Кремля и войска гетмана Ходкевича.</a:t>
             </a:r>
           </a:p>
           <a:p>
             <a:pPr>
               <a:spcAft>
-                <a:spcPts val="800"/>
+                <a:spcPts val="600"/>
               </a:spcAft>
             </a:pPr>
             <a:r>
-              <a:rPr sz="1900" b="1">
+              <a:rPr sz="1700" b="1">
                 <a:solidFill>
                   <a:srgbClr val="1B2A4A"/>
                 </a:solidFill>
               </a:rPr>
-              <a:t>Что было: </a:t>
-            </a:r>
-            <a:r>
-              <a:rPr sz="1900">
+              <a:t>Силы: </a:t>
+            </a:r>
+            <a:r>
+              <a:rPr sz="1700">
                 <a:solidFill>
                   <a:srgbClr val="222222"/>
                 </a:solidFill>
               </a:rPr>
-              <a:t>Второе ополчение разбило Ходкевича; 4 ноября — капитуляция гарнизона.</a:t>
+              <a:t>у ополчения — около 10 тыс., у Ходкевича — 12–15 тыс. плюс гарнизон Кремля.</a:t>
             </a:r>
           </a:p>
           <a:p>
             <a:pPr>
               <a:spcAft>
-                <a:spcPts val="800"/>
+                <a:spcPts val="600"/>
               </a:spcAft>
             </a:pPr>
             <a:r>
-              <a:rPr sz="1900" b="1">
+              <a:rPr sz="1700" b="1">
                 <a:solidFill>
                   <a:srgbClr val="1B2A4A"/>
                 </a:solidFill>
               </a:rPr>
-              <a:t>Итог: </a:t>
-            </a:r>
-            <a:r>
-              <a:rPr sz="1900">
+              <a:t>Ход боёв: </a:t>
+            </a:r>
+            <a:r>
+              <a:rPr sz="1700">
                 <a:solidFill>
                   <a:srgbClr val="222222"/>
                 </a:solidFill>
               </a:rPr>
-              <a:t>конец Смутного времени, избрание Романовых в 1613 году.</a:t>
+              <a:t>22–24 августа ополчение отбило все попытки Ходкевича прорваться в Кремль (бой у Новодевичьего монастыря).</a:t>
+            </a:r>
+          </a:p>
+          <a:p>
+            <a:pPr>
+              <a:spcAft>
+                <a:spcPts val="600"/>
+              </a:spcAft>
+            </a:pPr>
+            <a:r>
+              <a:rPr sz="1700" b="1">
+                <a:solidFill>
+                  <a:srgbClr val="1B2A4A"/>
+                </a:solidFill>
+              </a:rPr>
+              <a:t>Осада: </a:t>
+            </a:r>
+            <a:r>
+              <a:rPr sz="1700">
+                <a:solidFill>
+                  <a:srgbClr val="222222"/>
+                </a:solidFill>
+              </a:rPr>
+              <a:t>гарнизон остался без еды и помощи; 26 октября (4 ноября) Кремль капитулировал.</a:t>
+            </a:r>
+          </a:p>
+          <a:p>
+            <a:pPr>
+              <a:spcAft>
+                <a:spcPts val="600"/>
+              </a:spcAft>
+            </a:pPr>
+            <a:r>
+              <a:rPr sz="1700" b="1">
+                <a:solidFill>
+                  <a:srgbClr val="1B2A4A"/>
+                </a:solidFill>
+              </a:rPr>
+              <a:t>Сразу после: </a:t>
+            </a:r>
+            <a:r>
+              <a:rPr sz="1700">
+                <a:solidFill>
+                  <a:srgbClr val="222222"/>
+                </a:solidFill>
+              </a:rPr>
+              <a:t>в 1613 году избран Михаил Романов — конец Смуты.</a:t>
             </a:r>
           </a:p>
         </p:txBody>
@@ -7014,8 +6740,8 @@
         </p:nvSpPr>
         <p:spPr>
           <a:xfrm>
-            <a:off x="640080" y="4617720"/>
-            <a:ext cx="10881360" cy="1417320"/>
+            <a:off x="640080" y="4709160"/>
+            <a:ext cx="10881360" cy="1325880"/>
           </a:xfrm>
           <a:prstGeom prst="rect">
             <a:avLst/>
@@ -7047,20 +6773,20 @@
           <a:p>
             <a:pPr algn="ctr"/>
             <a:r>
-              <a:rPr sz="1800" b="1">
+              <a:rPr sz="1700" b="1">
                 <a:solidFill>
                   <a:srgbClr val="1B2A4A"/>
                 </a:solidFill>
               </a:rPr>
-              <a:t>Значение для государственности: </a:t>
-            </a:r>
-            <a:r>
-              <a:rPr sz="1800">
+              <a:t>Итог: </a:t>
+            </a:r>
+            <a:r>
+              <a:rPr sz="1700">
                 <a:solidFill>
                   <a:srgbClr val="222222"/>
                 </a:solidFill>
               </a:rPr>
-              <a:t>Для государственности: народ спас государство, когда оно почти исчезло. Праздник — День народного единства.</a:t>
+              <a:t>спасение русской государственности народом; праздник — 4 ноября, День народного единства.</a:t>
             </a:r>
           </a:p>
         </p:txBody>
@@ -7073,8 +6799,8 @@
         </p:nvSpPr>
         <p:spPr>
           <a:xfrm>
-            <a:off x="640080" y="4617720"/>
-            <a:ext cx="82296" cy="1417320"/>
+            <a:off x="640080" y="4709160"/>
+            <a:ext cx="82296" cy="1325880"/>
           </a:xfrm>
           <a:prstGeom prst="rect">
             <a:avLst/>
@@ -7173,7 +6899,7 @@
               </a:defRPr>
             </a:pPr>
             <a:r>
-              <a:t>5/12</a:t>
+              <a:t>5/11</a:t>
             </a:r>
           </a:p>
         </p:txBody>
@@ -7320,7 +7046,7 @@
               </a:defRPr>
             </a:pPr>
             <a:r>
-              <a:t>1709  •  Пётр I</a:t>
+              <a:t>27 июня (8 июля) 1709  •  Пётр I против Карла XII</a:t>
             </a:r>
           </a:p>
           <a:p>
@@ -7345,8 +7071,8 @@
         </p:nvSpPr>
         <p:spPr>
           <a:xfrm>
-            <a:off x="640080" y="1920240"/>
-            <a:ext cx="10881360" cy="2651760"/>
+            <a:off x="640080" y="1783080"/>
+            <a:ext cx="10881360" cy="2834640"/>
           </a:xfrm>
           <a:prstGeom prst="rect">
             <a:avLst/>
@@ -7361,70 +7087,116 @@
           <a:p>
             <a:pPr>
               <a:spcAft>
-                <a:spcPts val="800"/>
+                <a:spcPts val="600"/>
               </a:spcAft>
             </a:pPr>
             <a:r>
-              <a:rPr sz="1900" b="1">
+              <a:rPr sz="1700" b="1">
                 <a:solidFill>
                   <a:srgbClr val="1B2A4A"/>
                 </a:solidFill>
               </a:rPr>
-              <a:t>Противник: </a:t>
-            </a:r>
-            <a:r>
-              <a:rPr sz="1900">
+              <a:t>Перед боем: </a:t>
+            </a:r>
+            <a:r>
+              <a:rPr sz="1700">
                 <a:solidFill>
                   <a:srgbClr val="222222"/>
                 </a:solidFill>
               </a:rPr>
-              <a:t>армия шведского короля Карла XII.</a:t>
+              <a:t>шведы осаждали Полтаву; гарнизон Келина выдержал 20 штурмов, дав Петру время.</a:t>
             </a:r>
           </a:p>
           <a:p>
             <a:pPr>
               <a:spcAft>
-                <a:spcPts val="800"/>
+                <a:spcPts val="600"/>
               </a:spcAft>
             </a:pPr>
             <a:r>
-              <a:rPr sz="1900" b="1">
+              <a:rPr sz="1700" b="1">
                 <a:solidFill>
                   <a:srgbClr val="1B2A4A"/>
                 </a:solidFill>
               </a:rPr>
-              <a:t>Что было: </a:t>
-            </a:r>
-            <a:r>
-              <a:rPr sz="1900">
+              <a:t>Силы в бою: </a:t>
+            </a:r>
+            <a:r>
+              <a:rPr sz="1700">
                 <a:solidFill>
                   <a:srgbClr val="222222"/>
                 </a:solidFill>
               </a:rPr>
-              <a:t>разгром шведов под Полтавой; день славы — 10 июля.</a:t>
+              <a:t>≈42 тыс. русских и 100+ орудий против ≈17–20 тыс. шведов всего с 4 орудиями.</a:t>
             </a:r>
           </a:p>
           <a:p>
             <a:pPr>
               <a:spcAft>
-                <a:spcPts val="800"/>
+                <a:spcPts val="600"/>
               </a:spcAft>
             </a:pPr>
             <a:r>
-              <a:rPr sz="1900" b="1">
+              <a:rPr sz="1700" b="1">
                 <a:solidFill>
                   <a:srgbClr val="1B2A4A"/>
                 </a:solidFill>
               </a:rPr>
-              <a:t>Итог: </a:t>
-            </a:r>
-            <a:r>
-              <a:rPr sz="1900">
+              <a:t>Ход боя: </a:t>
+            </a:r>
+            <a:r>
+              <a:rPr sz="1700">
                 <a:solidFill>
                   <a:srgbClr val="222222"/>
                 </a:solidFill>
               </a:rPr>
-              <a:t>перелом Северной войны, выход к Балтике, статус великой державы.</a:t>
+              <a:t>редуты измотали шведов; решающая атака русской пехоты и конницы Меншикова — 2 часа, и армия Карла бежит.</a:t>
+            </a:r>
+          </a:p>
+          <a:p>
+            <a:pPr>
+              <a:spcAft>
+                <a:spcPts val="600"/>
+              </a:spcAft>
+            </a:pPr>
+            <a:r>
+              <a:rPr sz="1700" b="1">
+                <a:solidFill>
+                  <a:srgbClr val="1B2A4A"/>
+                </a:solidFill>
+              </a:rPr>
+              <a:t>Потери: </a:t>
+            </a:r>
+            <a:r>
+              <a:rPr sz="1700">
+                <a:solidFill>
+                  <a:srgbClr val="222222"/>
+                </a:solidFill>
+              </a:rPr>
+              <a:t>шведы — 9+ тыс. убитых и ~19 тыс. пленных; русские — 1345 убитых и 3290 раненых.</a:t>
+            </a:r>
+          </a:p>
+          <a:p>
+            <a:pPr>
+              <a:spcAft>
+                <a:spcPts val="600"/>
+              </a:spcAft>
+            </a:pPr>
+            <a:r>
+              <a:rPr sz="1700" b="1">
+                <a:solidFill>
+                  <a:srgbClr val="1B2A4A"/>
+                </a:solidFill>
+              </a:rPr>
+              <a:t>Погоня: </a:t>
+            </a:r>
+            <a:r>
+              <a:rPr sz="1700">
+                <a:solidFill>
+                  <a:srgbClr val="222222"/>
+                </a:solidFill>
+              </a:rPr>
+              <a:t>остатки шведов капитулировали у Переволочны; Карл XII бежал в Османскую империю.</a:t>
             </a:r>
           </a:p>
         </p:txBody>
@@ -7437,8 +7209,8 @@
         </p:nvSpPr>
         <p:spPr>
           <a:xfrm>
-            <a:off x="640080" y="4617720"/>
-            <a:ext cx="10881360" cy="1417320"/>
+            <a:off x="640080" y="4709160"/>
+            <a:ext cx="10881360" cy="1325880"/>
           </a:xfrm>
           <a:prstGeom prst="rect">
             <a:avLst/>
@@ -7470,20 +7242,20 @@
           <a:p>
             <a:pPr algn="ctr"/>
             <a:r>
-              <a:rPr sz="1800" b="1">
+              <a:rPr sz="1700" b="1">
                 <a:solidFill>
                   <a:srgbClr val="1B2A4A"/>
                 </a:solidFill>
               </a:rPr>
-              <a:t>Значение для государственности: </a:t>
-            </a:r>
-            <a:r>
-              <a:rPr sz="1800">
+              <a:t>Итог: </a:t>
+            </a:r>
+            <a:r>
+              <a:rPr sz="1700">
                 <a:solidFill>
                   <a:srgbClr val="222222"/>
                 </a:solidFill>
               </a:rPr>
-              <a:t>Для государственности: рождение Российской империи (1721) как европейской великой державы.</a:t>
+              <a:t>перелом Северной войны, выход к Балтике, статус великой державы; день славы — 10 июля.</a:t>
             </a:r>
           </a:p>
         </p:txBody>
@@ -7496,8 +7268,8 @@
         </p:nvSpPr>
         <p:spPr>
           <a:xfrm>
-            <a:off x="640080" y="4617720"/>
-            <a:ext cx="82296" cy="1417320"/>
+            <a:off x="640080" y="4709160"/>
+            <a:ext cx="82296" cy="1325880"/>
           </a:xfrm>
           <a:prstGeom prst="rect">
             <a:avLst/>
@@ -7596,7 +7368,7 @@
               </a:defRPr>
             </a:pPr>
             <a:r>
-              <a:t>6/12</a:t>
+              <a:t>6/11</a:t>
             </a:r>
           </a:p>
         </p:txBody>
@@ -7743,7 +7515,7 @@
               </a:defRPr>
             </a:pPr>
             <a:r>
-              <a:t>1812  •  М. И. Кутузов</a:t>
+              <a:t>7 сентября — декабрь 1812  •  М. И. Кутузов против Наполеона</a:t>
             </a:r>
           </a:p>
           <a:p>
@@ -7755,7 +7527,7 @@
               </a:defRPr>
             </a:pPr>
             <a:r>
-              <a:t>Бородино и победа 1812 года</a:t>
+              <a:t>Бородино и гибель «Великой армии»</a:t>
             </a:r>
           </a:p>
         </p:txBody>
@@ -7768,8 +7540,8 @@
         </p:nvSpPr>
         <p:spPr>
           <a:xfrm>
-            <a:off x="640080" y="1920240"/>
-            <a:ext cx="10881360" cy="2651760"/>
+            <a:off x="640080" y="1783080"/>
+            <a:ext cx="10881360" cy="2834640"/>
           </a:xfrm>
           <a:prstGeom prst="rect">
             <a:avLst/>
@@ -7784,70 +7556,116 @@
           <a:p>
             <a:pPr>
               <a:spcAft>
-                <a:spcPts val="800"/>
+                <a:spcPts val="600"/>
               </a:spcAft>
             </a:pPr>
             <a:r>
-              <a:rPr sz="1900" b="1">
+              <a:rPr sz="1700" b="1">
                 <a:solidFill>
                   <a:srgbClr val="1B2A4A"/>
                 </a:solidFill>
               </a:rPr>
-              <a:t>Противник: </a:t>
-            </a:r>
-            <a:r>
-              <a:rPr sz="1900">
+              <a:t>Силы при Бородине: </a:t>
+            </a:r>
+            <a:r>
+              <a:rPr sz="1700">
                 <a:solidFill>
                   <a:srgbClr val="222222"/>
                 </a:solidFill>
               </a:rPr>
-              <a:t>«Великая армия» Наполеона (600+ тысяч).</a:t>
+              <a:t>≈120–150 тыс. русских против ≈135 тыс. французов; потери — десятки тысяч с каждой стороны.</a:t>
             </a:r>
           </a:p>
           <a:p>
             <a:pPr>
               <a:spcAft>
-                <a:spcPts val="800"/>
+                <a:spcPts val="600"/>
               </a:spcAft>
             </a:pPr>
             <a:r>
-              <a:rPr sz="1900" b="1">
+              <a:rPr sz="1700" b="1">
                 <a:solidFill>
                   <a:srgbClr val="1B2A4A"/>
                 </a:solidFill>
               </a:rPr>
-              <a:t>Что было: </a:t>
-            </a:r>
-            <a:r>
-              <a:rPr sz="1900">
+              <a:t>Ход боя: </a:t>
+            </a:r>
+            <a:r>
+              <a:rPr sz="1700">
                 <a:solidFill>
                   <a:srgbClr val="222222"/>
                 </a:solidFill>
               </a:rPr>
-              <a:t>Бородинское сражение 7 сентября; пожар Москвы; изгнание врага к декабрю.</a:t>
+              <a:t>бой с утра до вечера: Багратионовы флеши, батарея Раевского по 8 раз переходили из рук в руки.</a:t>
             </a:r>
           </a:p>
           <a:p>
             <a:pPr>
               <a:spcAft>
-                <a:spcPts val="800"/>
+                <a:spcPts val="600"/>
               </a:spcAft>
             </a:pPr>
             <a:r>
-              <a:rPr sz="1900" b="1">
+              <a:rPr sz="1700" b="1">
                 <a:solidFill>
                   <a:srgbClr val="1B2A4A"/>
                 </a:solidFill>
               </a:rPr>
-              <a:t>Итог: </a:t>
-            </a:r>
-            <a:r>
-              <a:rPr sz="1900">
+              <a:t>После боя: </a:t>
+            </a:r>
+            <a:r>
+              <a:rPr sz="1700">
                 <a:solidFill>
                   <a:srgbClr val="222222"/>
                 </a:solidFill>
               </a:rPr>
-              <a:t>гибель армии Наполеона, в 1814 году русские войска вошли в Париж.</a:t>
+              <a:t>русские отошли, сохранив армию; Наполеон занял Москву — и попал в ловушку.</a:t>
+            </a:r>
+          </a:p>
+          <a:p>
+            <a:pPr>
+              <a:spcAft>
+                <a:spcPts val="600"/>
+              </a:spcAft>
+            </a:pPr>
+            <a:r>
+              <a:rPr sz="1700" b="1">
+                <a:solidFill>
+                  <a:srgbClr val="1B2A4A"/>
+                </a:solidFill>
+              </a:rPr>
+              <a:t>Катастрофа врага: </a:t>
+            </a:r>
+            <a:r>
+              <a:rPr sz="1700">
+                <a:solidFill>
+                  <a:srgbClr val="222222"/>
+                </a:solidFill>
+              </a:rPr>
+              <a:t>пожары, голод, морозы, партизаны; к декабрю «Великая армия» уничтожена.</a:t>
+            </a:r>
+          </a:p>
+          <a:p>
+            <a:pPr>
+              <a:spcAft>
+                <a:spcPts val="600"/>
+              </a:spcAft>
+            </a:pPr>
+            <a:r>
+              <a:rPr sz="1700" b="1">
+                <a:solidFill>
+                  <a:srgbClr val="1B2A4A"/>
+                </a:solidFill>
+              </a:rPr>
+              <a:t>Финал войны: </a:t>
+            </a:r>
+            <a:r>
+              <a:rPr sz="1700">
+                <a:solidFill>
+                  <a:srgbClr val="222222"/>
+                </a:solidFill>
+              </a:rPr>
+              <a:t>в 1813–1814 годах русская армия освободила Европу и вступила в Париж.</a:t>
             </a:r>
           </a:p>
         </p:txBody>
@@ -7860,8 +7678,8 @@
         </p:nvSpPr>
         <p:spPr>
           <a:xfrm>
-            <a:off x="640080" y="4617720"/>
-            <a:ext cx="10881360" cy="1417320"/>
+            <a:off x="640080" y="4709160"/>
+            <a:ext cx="10881360" cy="1325880"/>
           </a:xfrm>
           <a:prstGeom prst="rect">
             <a:avLst/>
@@ -7893,20 +7711,20 @@
           <a:p>
             <a:pPr algn="ctr"/>
             <a:r>
-              <a:rPr sz="1800" b="1">
+              <a:rPr sz="1700" b="1">
                 <a:solidFill>
                   <a:srgbClr val="1B2A4A"/>
                 </a:solidFill>
               </a:rPr>
-              <a:t>Значение для государственности: </a:t>
-            </a:r>
-            <a:r>
-              <a:rPr sz="1800">
+              <a:t>Итог: </a:t>
+            </a:r>
+            <a:r>
+              <a:rPr sz="1700">
                 <a:solidFill>
                   <a:srgbClr val="222222"/>
                 </a:solidFill>
               </a:rPr>
-              <a:t>Для государственности: Россия отстояла независимость и освободила Европу; рождение идеи Отечественной войны.</a:t>
+              <a:t>Россия выстояла и сокрушила Наполеона; день Бородина — 8 сентября.</a:t>
             </a:r>
           </a:p>
         </p:txBody>
@@ -7919,8 +7737,8 @@
         </p:nvSpPr>
         <p:spPr>
           <a:xfrm>
-            <a:off x="640080" y="4617720"/>
-            <a:ext cx="82296" cy="1417320"/>
+            <a:off x="640080" y="4709160"/>
+            <a:ext cx="82296" cy="1325880"/>
           </a:xfrm>
           <a:prstGeom prst="rect">
             <a:avLst/>
@@ -8019,7 +7837,7 @@
               </a:defRPr>
             </a:pPr>
             <a:r>
-              <a:t>7/12</a:t>
+              <a:t>7/11</a:t>
             </a:r>
           </a:p>
         </p:txBody>
@@ -8166,7 +7984,7 @@
               </a:defRPr>
             </a:pPr>
             <a:r>
-              <a:t>1942–1943</a:t>
+              <a:t>17 июля 1942 — 2 февраля 1943</a:t>
             </a:r>
           </a:p>
           <a:p>
@@ -8178,7 +7996,7 @@
               </a:defRPr>
             </a:pPr>
             <a:r>
-              <a:t>Сталинград и Курск</a:t>
+              <a:t>Сталинградская битва</a:t>
             </a:r>
           </a:p>
         </p:txBody>
@@ -8191,8 +8009,8 @@
         </p:nvSpPr>
         <p:spPr>
           <a:xfrm>
-            <a:off x="640080" y="1920240"/>
-            <a:ext cx="10881360" cy="2651760"/>
+            <a:off x="640080" y="1783080"/>
+            <a:ext cx="10881360" cy="2834640"/>
           </a:xfrm>
           <a:prstGeom prst="rect">
             <a:avLst/>
@@ -8207,70 +8025,116 @@
           <a:p>
             <a:pPr>
               <a:spcAft>
-                <a:spcPts val="800"/>
+                <a:spcPts val="600"/>
               </a:spcAft>
             </a:pPr>
             <a:r>
-              <a:rPr sz="1900" b="1">
+              <a:rPr sz="1700" b="1">
                 <a:solidFill>
                   <a:srgbClr val="1B2A4A"/>
                 </a:solidFill>
               </a:rPr>
-              <a:t>Сталинград: </a:t>
-            </a:r>
-            <a:r>
-              <a:rPr sz="1900">
+              <a:t>Оборона: </a:t>
+            </a:r>
+            <a:r>
+              <a:rPr sz="1700">
                 <a:solidFill>
                   <a:srgbClr val="222222"/>
                 </a:solidFill>
               </a:rPr>
-              <a:t>июль 1942 — 2 февраля 1943; окружение и капитуляция армии Паулюса.</a:t>
+              <a:t>июль–ноябрь 1942: бои за каждый дом и цех; город удержан на узкой полосе у Волги.</a:t>
             </a:r>
           </a:p>
           <a:p>
             <a:pPr>
               <a:spcAft>
-                <a:spcPts val="800"/>
+                <a:spcPts val="600"/>
               </a:spcAft>
             </a:pPr>
             <a:r>
-              <a:rPr sz="1900" b="1">
+              <a:rPr sz="1700" b="1">
                 <a:solidFill>
                   <a:srgbClr val="1B2A4A"/>
                 </a:solidFill>
               </a:rPr>
-              <a:t>Курск: </a:t>
-            </a:r>
-            <a:r>
-              <a:rPr sz="1900">
+              <a:t>Перелом: </a:t>
+            </a:r>
+            <a:r>
+              <a:rPr sz="1700">
                 <a:solidFill>
                   <a:srgbClr val="222222"/>
                 </a:solidFill>
               </a:rPr>
-              <a:t>июль–август 1943; крупнейшее танковое сражение; крах немецкого наступления.</a:t>
+              <a:t>19 ноября — операция «Уран»: удары по флангам, окружение ~300 тыс. группировки Паулюса.</a:t>
             </a:r>
           </a:p>
           <a:p>
             <a:pPr>
               <a:spcAft>
-                <a:spcPts val="800"/>
+                <a:spcPts val="600"/>
               </a:spcAft>
             </a:pPr>
             <a:r>
-              <a:rPr sz="1900" b="1">
+              <a:rPr sz="1700" b="1">
                 <a:solidFill>
                   <a:srgbClr val="1B2A4A"/>
                 </a:solidFill>
               </a:rPr>
-              <a:t>Итог: </a:t>
-            </a:r>
-            <a:r>
-              <a:rPr sz="1900">
+              <a:t>Кольцо: </a:t>
+            </a:r>
+            <a:r>
+              <a:rPr sz="1700">
                 <a:solidFill>
                   <a:srgbClr val="222222"/>
                 </a:solidFill>
               </a:rPr>
-              <a:t>коренной перелом Великой Отечественной войны.</a:t>
+              <a:t>декабрь–январь: срыв попыток деблокады (Манштейн), сжатие котла.</a:t>
+            </a:r>
+          </a:p>
+          <a:p>
+            <a:pPr>
+              <a:spcAft>
+                <a:spcPts val="600"/>
+              </a:spcAft>
+            </a:pPr>
+            <a:r>
+              <a:rPr sz="1700" b="1">
+                <a:solidFill>
+                  <a:srgbClr val="1B2A4A"/>
+                </a:solidFill>
+              </a:rPr>
+              <a:t>Финал: </a:t>
+            </a:r>
+            <a:r>
+              <a:rPr sz="1700">
+                <a:solidFill>
+                  <a:srgbClr val="222222"/>
+                </a:solidFill>
+              </a:rPr>
+              <a:t>31 января — 2 февраля 1943: Паулюс капитулировал. День славы — 2 февраля.</a:t>
+            </a:r>
+          </a:p>
+          <a:p>
+            <a:pPr>
+              <a:spcAft>
+                <a:spcPts val="600"/>
+              </a:spcAft>
+            </a:pPr>
+            <a:r>
+              <a:rPr sz="1700" b="1">
+                <a:solidFill>
+                  <a:srgbClr val="1B2A4A"/>
+                </a:solidFill>
+              </a:rPr>
+              <a:t>Масштаб: </a:t>
+            </a:r>
+            <a:r>
+              <a:rPr sz="1700">
+                <a:solidFill>
+                  <a:srgbClr val="222222"/>
+                </a:solidFill>
+              </a:rPr>
+              <a:t>потери с обеих сторон — более миллиона человек; крупнейшее поражение вермахта к тому моменту.</a:t>
             </a:r>
           </a:p>
         </p:txBody>
@@ -8283,8 +8147,8 @@
         </p:nvSpPr>
         <p:spPr>
           <a:xfrm>
-            <a:off x="640080" y="4617720"/>
-            <a:ext cx="10881360" cy="1417320"/>
+            <a:off x="640080" y="4709160"/>
+            <a:ext cx="10881360" cy="1325880"/>
           </a:xfrm>
           <a:prstGeom prst="rect">
             <a:avLst/>
@@ -8316,20 +8180,20 @@
           <a:p>
             <a:pPr algn="ctr"/>
             <a:r>
-              <a:rPr sz="1800" b="1">
+              <a:rPr sz="1700" b="1">
                 <a:solidFill>
                   <a:srgbClr val="1B2A4A"/>
                 </a:solidFill>
               </a:rPr>
-              <a:t>Значение для государственности: </a:t>
-            </a:r>
-            <a:r>
-              <a:rPr sz="1800">
+              <a:t>Итог: </a:t>
+            </a:r>
+            <a:r>
+              <a:rPr sz="1700">
                 <a:solidFill>
                   <a:srgbClr val="222222"/>
                 </a:solidFill>
               </a:rPr>
-              <a:t>Для государственности: страна выстояла на грани уничтожения и переломила ход войны.</a:t>
+              <a:t>коренной перелом войны: инициатива перешла к СССР.</a:t>
             </a:r>
           </a:p>
         </p:txBody>
@@ -8342,8 +8206,8 @@
         </p:nvSpPr>
         <p:spPr>
           <a:xfrm>
-            <a:off x="640080" y="4617720"/>
-            <a:ext cx="82296" cy="1417320"/>
+            <a:off x="640080" y="4709160"/>
+            <a:ext cx="82296" cy="1325880"/>
           </a:xfrm>
           <a:prstGeom prst="rect">
             <a:avLst/>
@@ -8442,7 +8306,7 @@
               </a:defRPr>
             </a:pPr>
             <a:r>
-              <a:t>8/12</a:t>
+              <a:t>8/11</a:t>
             </a:r>
           </a:p>
         </p:txBody>
@@ -8589,7 +8453,7 @@
               </a:defRPr>
             </a:pPr>
             <a:r>
-              <a:t>9 мая 1945</a:t>
+              <a:t>5 июля — 23 августа 1943</a:t>
             </a:r>
           </a:p>
           <a:p>
@@ -8601,7 +8465,7 @@
               </a:defRPr>
             </a:pPr>
             <a:r>
-              <a:t>Взятие Берлина. Победа</a:t>
+              <a:t>Курская битва</a:t>
             </a:r>
           </a:p>
         </p:txBody>
@@ -8614,8 +8478,8 @@
         </p:nvSpPr>
         <p:spPr>
           <a:xfrm>
-            <a:off x="640080" y="1920240"/>
-            <a:ext cx="10881360" cy="2651760"/>
+            <a:off x="640080" y="1783080"/>
+            <a:ext cx="10881360" cy="2834640"/>
           </a:xfrm>
           <a:prstGeom prst="rect">
             <a:avLst/>
@@ -8630,70 +8494,116 @@
           <a:p>
             <a:pPr>
               <a:spcAft>
-                <a:spcPts val="800"/>
+                <a:spcPts val="600"/>
               </a:spcAft>
             </a:pPr>
             <a:r>
-              <a:rPr sz="1900" b="1">
+              <a:rPr sz="1700" b="1">
                 <a:solidFill>
                   <a:srgbClr val="1B2A4A"/>
                 </a:solidFill>
               </a:rPr>
-              <a:t>Что было: </a:t>
-            </a:r>
-            <a:r>
-              <a:rPr sz="1900">
+              <a:t>Замысел врага: </a:t>
+            </a:r>
+            <a:r>
+              <a:rPr sz="1700">
                 <a:solidFill>
                   <a:srgbClr val="222222"/>
                 </a:solidFill>
               </a:rPr>
-              <a:t>Берлинская операция 16 апреля — 8 мая; капитуляция Германии.</a:t>
+              <a:t>операция «Цитадель»: срезать Курский выступ ударами с севера и юга.</a:t>
             </a:r>
           </a:p>
           <a:p>
             <a:pPr>
               <a:spcAft>
-                <a:spcPts val="800"/>
+                <a:spcPts val="600"/>
               </a:spcAft>
             </a:pPr>
             <a:r>
-              <a:rPr sz="1900" b="1">
+              <a:rPr sz="1700" b="1">
                 <a:solidFill>
                   <a:srgbClr val="1B2A4A"/>
                 </a:solidFill>
               </a:rPr>
-              <a:t>Цена: </a:t>
-            </a:r>
-            <a:r>
-              <a:rPr sz="1900">
+              <a:t>Оборона: </a:t>
+            </a:r>
+            <a:r>
+              <a:rPr sz="1700">
                 <a:solidFill>
                   <a:srgbClr val="222222"/>
                 </a:solidFill>
               </a:rPr>
-              <a:t>около 27 млн жизней советских граждан.</a:t>
+              <a:t>глубоко эшелонированная оборона; немецкие клинья увязли за неделю боёв.</a:t>
             </a:r>
           </a:p>
           <a:p>
             <a:pPr>
               <a:spcAft>
-                <a:spcPts val="800"/>
+                <a:spcPts val="600"/>
               </a:spcAft>
             </a:pPr>
             <a:r>
-              <a:rPr sz="1900" b="1">
+              <a:rPr sz="1700" b="1">
                 <a:solidFill>
                   <a:srgbClr val="1B2A4A"/>
                 </a:solidFill>
               </a:rPr>
-              <a:t>Итог: </a:t>
-            </a:r>
-            <a:r>
-              <a:rPr sz="1900">
+              <a:t>Прохоровка: </a:t>
+            </a:r>
+            <a:r>
+              <a:rPr sz="1700">
                 <a:solidFill>
                   <a:srgbClr val="222222"/>
                 </a:solidFill>
               </a:rPr>
-              <a:t>спасение страны и мира от нацизма.</a:t>
+              <a:t>12 июля — крупнейшее встречное танковое сражение истории (сотни танков с каждой стороны).</a:t>
+            </a:r>
+          </a:p>
+          <a:p>
+            <a:pPr>
+              <a:spcAft>
+                <a:spcPts val="600"/>
+              </a:spcAft>
+            </a:pPr>
+            <a:r>
+              <a:rPr sz="1700" b="1">
+                <a:solidFill>
+                  <a:srgbClr val="1B2A4A"/>
+                </a:solidFill>
+              </a:rPr>
+              <a:t>Наступление: </a:t>
+            </a:r>
+            <a:r>
+              <a:rPr sz="1700">
+                <a:solidFill>
+                  <a:srgbClr val="222222"/>
+                </a:solidFill>
+              </a:rPr>
+              <a:t>орловская и белгородско-харьковская операции; освобождены Орёл, Белгород, Харьков.</a:t>
+            </a:r>
+          </a:p>
+          <a:p>
+            <a:pPr>
+              <a:spcAft>
+                <a:spcPts val="600"/>
+              </a:spcAft>
+            </a:pPr>
+            <a:r>
+              <a:rPr sz="1700" b="1">
+                <a:solidFill>
+                  <a:srgbClr val="1B2A4A"/>
+                </a:solidFill>
+              </a:rPr>
+              <a:t>Салют: </a:t>
+            </a:r>
+            <a:r>
+              <a:rPr sz="1700">
+                <a:solidFill>
+                  <a:srgbClr val="222222"/>
+                </a:solidFill>
+              </a:rPr>
+              <a:t>5 августа — первый салют в Москве в честь освобождения Орла и Белгорода.</a:t>
             </a:r>
           </a:p>
         </p:txBody>
@@ -8706,8 +8616,8 @@
         </p:nvSpPr>
         <p:spPr>
           <a:xfrm>
-            <a:off x="640080" y="4617720"/>
-            <a:ext cx="10881360" cy="1417320"/>
+            <a:off x="640080" y="4709160"/>
+            <a:ext cx="10881360" cy="1325880"/>
           </a:xfrm>
           <a:prstGeom prst="rect">
             <a:avLst/>
@@ -8739,20 +8649,20 @@
           <a:p>
             <a:pPr algn="ctr"/>
             <a:r>
-              <a:rPr sz="1800" b="1">
+              <a:rPr sz="1700" b="1">
                 <a:solidFill>
                   <a:srgbClr val="1B2A4A"/>
                 </a:solidFill>
               </a:rPr>
-              <a:t>Значение для государственности: </a:t>
-            </a:r>
-            <a:r>
-              <a:rPr sz="1800">
+              <a:t>Итог: </a:t>
+            </a:r>
+            <a:r>
+              <a:rPr sz="1700">
                 <a:solidFill>
                   <a:srgbClr val="222222"/>
                 </a:solidFill>
               </a:rPr>
-              <a:t>Для государственности: Победа — основа современной исторической памяти и системы дней воинской славы.</a:t>
+              <a:t>провал последнего немецкого наступления на востоке; день славы — 23 августа.</a:t>
             </a:r>
           </a:p>
         </p:txBody>
@@ -8765,8 +8675,8 @@
         </p:nvSpPr>
         <p:spPr>
           <a:xfrm>
-            <a:off x="640080" y="4617720"/>
-            <a:ext cx="82296" cy="1417320"/>
+            <a:off x="640080" y="4709160"/>
+            <a:ext cx="82296" cy="1325880"/>
           </a:xfrm>
           <a:prstGeom prst="rect">
             <a:avLst/>
@@ -8865,7 +8775,7 @@
               </a:defRPr>
             </a:pPr>
             <a:r>
-              <a:t>9/12</a:t>
+              <a:t>9/11</a:t>
             </a:r>
           </a:p>
         </p:txBody>

--- a/klyuchevye-voennye-pobedy-rossii/prezentatsiya.pptx
+++ b/klyuchevye-voennye-pobedy-rossii/prezentatsiya.pptx
@@ -16,6 +16,7 @@
     <p:sldId id="264" r:id="rId16"/>
     <p:sldId id="265" r:id="rId17"/>
     <p:sldId id="266" r:id="rId18"/>
+    <p:sldId id="267" r:id="rId19"/>
   </p:sldIdLst>
   <p:sldSz cx="12188952" cy="6858000" type="screen4x3"/>
   <p:notesSz cx="6858000" cy="9144000"/>
@@ -653,6 +654,76 @@
           <a:p>
             <a:r>
               <a:t>Финал 20 секунд: одна фраза-вывод, источники, благодарность. Если спросят про цифры — честно: по старым векам это оценки историков, точных данных нет.</a:t>
+            </a:r>
+          </a:p>
+        </p:txBody>
+      </p:sp>
+      <p:sp>
+        <p:nvSpPr>
+          <p:cNvPr id="4" name="Slide Number Placeholder 3"/>
+          <p:cNvSpPr>
+            <a:spLocks noGrp="1"/>
+          </p:cNvSpPr>
+          <p:nvPr>
+            <p:ph type="sldNum" idx="5" sz="quarter"/>
+          </p:nvPr>
+        </p:nvSpPr>
+        <p:spPr/>
+      </p:sp>
+    </p:spTree>
+  </p:cSld>
+  <p:clrMapOvr>
+    <a:masterClrMapping/>
+  </p:clrMapOvr>
+</p:notes>
+</file>
+
+<file path=ppt/notesSlides/notesSlide12.xml><?xml version="1.0" encoding="utf-8"?>
+<p:notes xmlns:a="http://schemas.openxmlformats.org/drawingml/2006/main" xmlns:p="http://schemas.openxmlformats.org/presentationml/2006/main" xmlns:r="http://schemas.openxmlformats.org/officeDocument/2006/relationships">
+  <p:cSld>
+    <p:spTree>
+      <p:nvGrpSpPr>
+        <p:cNvPr id="1" name=""/>
+        <p:cNvGrpSpPr/>
+        <p:nvPr/>
+      </p:nvGrpSpPr>
+      <p:grpSpPr>
+        <a:xfrm>
+          <a:off x="0" y="0"/>
+          <a:ext cx="0" cy="0"/>
+          <a:chOff x="0" y="0"/>
+          <a:chExt cx="0" cy="0"/>
+        </a:xfrm>
+      </p:grpSpPr>
+      <p:sp>
+        <p:nvSpPr>
+          <p:cNvPr id="2" name="Slide Image Placeholder 1"/>
+          <p:cNvSpPr>
+            <a:spLocks noGrp="1"/>
+          </p:cNvSpPr>
+          <p:nvPr>
+            <p:ph type="sldImg" idx="2"/>
+          </p:nvPr>
+        </p:nvSpPr>
+        <p:spPr/>
+      </p:sp>
+      <p:sp>
+        <p:nvSpPr>
+          <p:cNvPr id="3" name="Notes Placeholder 2"/>
+          <p:cNvSpPr>
+            <a:spLocks noGrp="1"/>
+          </p:cNvSpPr>
+          <p:nvPr>
+            <p:ph type="body" idx="3" sz="quarter"/>
+          </p:nvPr>
+        </p:nvSpPr>
+        <p:spPr/>
+        <p:txBody>
+          <a:bodyPr/>
+          <a:lstStyle/>
+          <a:p>
+            <a:r>
+              <a:t>Запасной слайд — НЕ показывать в основном выступлении, только если спросят: «а где современная Россия?». Ответ: показать слайд и сказать, что по периоду с 1991 года общепризнанного списка побед в законе нет, поэтому в доклад взяты исторические вехи, а современность отражена здесь.</a:t>
             </a:r>
           </a:p>
         </p:txBody>
@@ -4893,7 +4964,7 @@
               </a:defRPr>
             </a:pPr>
             <a:r>
-              <a:t>10/11</a:t>
+              <a:t>10/12</a:t>
             </a:r>
           </a:p>
         </p:txBody>
@@ -5092,6 +5163,475 @@
 </p:sld>
 </file>
 
+<file path=ppt/slides/slide12.xml><?xml version="1.0" encoding="utf-8"?>
+<p:sld xmlns:a="http://schemas.openxmlformats.org/drawingml/2006/main" xmlns:p="http://schemas.openxmlformats.org/presentationml/2006/main" xmlns:r="http://schemas.openxmlformats.org/officeDocument/2006/relationships">
+  <p:cSld>
+    <p:bg>
+      <p:bgPr>
+        <a:solidFill>
+          <a:srgbClr val="FFFFFF"/>
+        </a:solidFill>
+        <a:effectLst/>
+      </p:bgPr>
+    </p:bg>
+    <p:spTree>
+      <p:nvGrpSpPr>
+        <p:cNvPr id="1" name=""/>
+        <p:cNvGrpSpPr/>
+        <p:nvPr/>
+      </p:nvGrpSpPr>
+      <p:grpSpPr/>
+      <p:sp>
+        <p:nvSpPr>
+          <p:cNvPr id="2" name="Rectangle 1"/>
+          <p:cNvSpPr/>
+          <p:nvPr/>
+        </p:nvSpPr>
+        <p:spPr>
+          <a:xfrm>
+            <a:off x="0" y="0"/>
+            <a:ext cx="12188952" cy="1417320"/>
+          </a:xfrm>
+          <a:prstGeom prst="rect">
+            <a:avLst/>
+          </a:prstGeom>
+          <a:solidFill>
+            <a:srgbClr val="1B2A4A"/>
+          </a:solidFill>
+          <a:ln>
+            <a:noFill/>
+          </a:ln>
+        </p:spPr>
+        <p:style>
+          <a:lnRef idx="1">
+            <a:schemeClr val="accent1"/>
+          </a:lnRef>
+          <a:fillRef idx="3">
+            <a:schemeClr val="accent1"/>
+          </a:fillRef>
+          <a:effectRef idx="2">
+            <a:schemeClr val="accent1"/>
+          </a:effectRef>
+          <a:fontRef idx="minor">
+            <a:schemeClr val="lt1"/>
+          </a:fontRef>
+        </p:style>
+        <p:txBody>
+          <a:bodyPr rtlCol="0" anchor="ctr"/>
+          <a:lstStyle/>
+          <a:p>
+            <a:pPr algn="ctr"/>
+          </a:p>
+        </p:txBody>
+      </p:sp>
+      <p:sp>
+        <p:nvSpPr>
+          <p:cNvPr id="3" name="Rectangle 2"/>
+          <p:cNvSpPr/>
+          <p:nvPr/>
+        </p:nvSpPr>
+        <p:spPr>
+          <a:xfrm>
+            <a:off x="0" y="1417320"/>
+            <a:ext cx="12188952" cy="64008"/>
+          </a:xfrm>
+          <a:prstGeom prst="rect">
+            <a:avLst/>
+          </a:prstGeom>
+          <a:solidFill>
+            <a:srgbClr val="C9A227"/>
+          </a:solidFill>
+          <a:ln>
+            <a:noFill/>
+          </a:ln>
+        </p:spPr>
+        <p:style>
+          <a:lnRef idx="1">
+            <a:schemeClr val="accent1"/>
+          </a:lnRef>
+          <a:fillRef idx="3">
+            <a:schemeClr val="accent1"/>
+          </a:fillRef>
+          <a:effectRef idx="2">
+            <a:schemeClr val="accent1"/>
+          </a:effectRef>
+          <a:fontRef idx="minor">
+            <a:schemeClr val="lt1"/>
+          </a:fontRef>
+        </p:style>
+        <p:txBody>
+          <a:bodyPr rtlCol="0" anchor="ctr"/>
+          <a:lstStyle/>
+          <a:p>
+            <a:pPr algn="ctr"/>
+          </a:p>
+        </p:txBody>
+      </p:sp>
+      <p:sp>
+        <p:nvSpPr>
+          <p:cNvPr id="4" name="TextBox 3"/>
+          <p:cNvSpPr txBox="1"/>
+          <p:nvPr/>
+        </p:nvSpPr>
+        <p:spPr>
+          <a:xfrm>
+            <a:off x="640080" y="228600"/>
+            <a:ext cx="10881360" cy="1005840"/>
+          </a:xfrm>
+          <a:prstGeom prst="rect">
+            <a:avLst/>
+          </a:prstGeom>
+          <a:noFill/>
+        </p:spPr>
+        <p:txBody>
+          <a:bodyPr wrap="square">
+            <a:spAutoFit/>
+          </a:bodyPr>
+          <a:lstStyle/>
+          <a:p>
+            <a:pPr>
+              <a:defRPr sz="1400" b="1">
+                <a:solidFill>
+                  <a:srgbClr val="C9A227"/>
+                </a:solidFill>
+              </a:defRPr>
+            </a:pPr>
+            <a:r>
+              <a:t>Запасной слайд  •  показать, только если спросят про период с 1991 года</a:t>
+            </a:r>
+          </a:p>
+          <a:p>
+            <a:pPr>
+              <a:defRPr sz="3000" b="1">
+                <a:solidFill>
+                  <a:srgbClr val="FFFFFF"/>
+                </a:solidFill>
+              </a:defRPr>
+            </a:pPr>
+            <a:r>
+              <a:t>Россия сегодня: воинская традиция продолжается</a:t>
+            </a:r>
+          </a:p>
+        </p:txBody>
+      </p:sp>
+      <p:sp>
+        <p:nvSpPr>
+          <p:cNvPr id="5" name="TextBox 4"/>
+          <p:cNvSpPr txBox="1"/>
+          <p:nvPr/>
+        </p:nvSpPr>
+        <p:spPr>
+          <a:xfrm>
+            <a:off x="640080" y="1783080"/>
+            <a:ext cx="10881360" cy="2834640"/>
+          </a:xfrm>
+          <a:prstGeom prst="rect">
+            <a:avLst/>
+          </a:prstGeom>
+          <a:noFill/>
+        </p:spPr>
+        <p:txBody>
+          <a:bodyPr wrap="square">
+            <a:spAutoFit/>
+          </a:bodyPr>
+          <a:lstStyle/>
+          <a:p>
+            <a:pPr>
+              <a:spcAft>
+                <a:spcPts val="600"/>
+              </a:spcAft>
+            </a:pPr>
+            <a:r>
+              <a:rPr sz="1700" b="1">
+                <a:solidFill>
+                  <a:srgbClr val="1B2A4A"/>
+                </a:solidFill>
+              </a:rPr>
+              <a:t>Армия восстановлена: </a:t>
+            </a:r>
+            <a:r>
+              <a:rPr sz="1700">
+                <a:solidFill>
+                  <a:srgbClr val="222222"/>
+                </a:solidFill>
+              </a:rPr>
+              <a:t>в 2000–2010-е годы — реформа, перевооружение, рост боевой подготовки.</a:t>
+            </a:r>
+          </a:p>
+          <a:p>
+            <a:pPr>
+              <a:spcAft>
+                <a:spcPts val="600"/>
+              </a:spcAft>
+            </a:pPr>
+            <a:r>
+              <a:rPr sz="1700" b="1">
+                <a:solidFill>
+                  <a:srgbClr val="1B2A4A"/>
+                </a:solidFill>
+              </a:rPr>
+              <a:t>Борьба с терроризмом: </a:t>
+            </a:r>
+            <a:r>
+              <a:rPr sz="1700">
+                <a:solidFill>
+                  <a:srgbClr val="222222"/>
+                </a:solidFill>
+              </a:rPr>
+              <a:t>контртеррористические операции на Северном Кавказе; режим КТО в Чечне завершён в 2009 году.</a:t>
+            </a:r>
+          </a:p>
+          <a:p>
+            <a:pPr>
+              <a:spcAft>
+                <a:spcPts val="600"/>
+              </a:spcAft>
+            </a:pPr>
+            <a:r>
+              <a:rPr sz="1700" b="1">
+                <a:solidFill>
+                  <a:srgbClr val="1B2A4A"/>
+                </a:solidFill>
+              </a:rPr>
+              <a:t>Миротворцы: </a:t>
+            </a:r>
+            <a:r>
+              <a:rPr sz="1700">
+                <a:solidFill>
+                  <a:srgbClr val="222222"/>
+                </a:solidFill>
+              </a:rPr>
+              <a:t>миссии в Приднестровье, Абхазии, Южной Осетии, Нагорном Карабахе (2020–2023), участие в операциях ООН.</a:t>
+            </a:r>
+          </a:p>
+          <a:p>
+            <a:pPr>
+              <a:spcAft>
+                <a:spcPts val="600"/>
+              </a:spcAft>
+            </a:pPr>
+            <a:r>
+              <a:rPr sz="1700" b="1">
+                <a:solidFill>
+                  <a:srgbClr val="1B2A4A"/>
+                </a:solidFill>
+              </a:rPr>
+              <a:t>Сирия: </a:t>
+            </a:r>
+            <a:r>
+              <a:rPr sz="1700">
+                <a:solidFill>
+                  <a:srgbClr val="222222"/>
+                </a:solidFill>
+              </a:rPr>
+              <a:t>с 2015 года — операция по просьбе правительства САР против международных террористических организаций.</a:t>
+            </a:r>
+          </a:p>
+          <a:p>
+            <a:pPr>
+              <a:spcAft>
+                <a:spcPts val="600"/>
+              </a:spcAft>
+            </a:pPr>
+            <a:r>
+              <a:rPr sz="1700" b="1">
+                <a:solidFill>
+                  <a:srgbClr val="1B2A4A"/>
+                </a:solidFill>
+              </a:rPr>
+              <a:t>Память: </a:t>
+            </a:r>
+            <a:r>
+              <a:rPr sz="1700">
+                <a:solidFill>
+                  <a:srgbClr val="222222"/>
+                </a:solidFill>
+              </a:rPr>
+              <a:t>парады 9 Мая, «Бессмертный полк», РВИО; закон о днях воинской славы дополняется (2023 — Крымская операция 1944).</a:t>
+            </a:r>
+          </a:p>
+        </p:txBody>
+      </p:sp>
+      <p:sp>
+        <p:nvSpPr>
+          <p:cNvPr id="6" name="Rectangle 5"/>
+          <p:cNvSpPr/>
+          <p:nvPr/>
+        </p:nvSpPr>
+        <p:spPr>
+          <a:xfrm>
+            <a:off x="640080" y="4709160"/>
+            <a:ext cx="10881360" cy="1325880"/>
+          </a:xfrm>
+          <a:prstGeom prst="rect">
+            <a:avLst/>
+          </a:prstGeom>
+          <a:solidFill>
+            <a:srgbClr val="F1ECDF"/>
+          </a:solidFill>
+          <a:ln>
+            <a:noFill/>
+          </a:ln>
+        </p:spPr>
+        <p:style>
+          <a:lnRef idx="1">
+            <a:schemeClr val="accent1"/>
+          </a:lnRef>
+          <a:fillRef idx="3">
+            <a:schemeClr val="accent1"/>
+          </a:fillRef>
+          <a:effectRef idx="2">
+            <a:schemeClr val="accent1"/>
+          </a:effectRef>
+          <a:fontRef idx="minor">
+            <a:schemeClr val="lt1"/>
+          </a:fontRef>
+        </p:style>
+        <p:txBody>
+          <a:bodyPr rtlCol="0" anchor="ctr" wrap="square" lIns="228600" rIns="228600"/>
+          <a:lstStyle/>
+          <a:p>
+            <a:pPr algn="ctr"/>
+            <a:r>
+              <a:rPr sz="1700" b="1">
+                <a:solidFill>
+                  <a:srgbClr val="1B2A4A"/>
+                </a:solidFill>
+              </a:rPr>
+              <a:t>Итог: </a:t>
+            </a:r>
+            <a:r>
+              <a:rPr sz="1700">
+                <a:solidFill>
+                  <a:srgbClr val="222222"/>
+                </a:solidFill>
+              </a:rPr>
+              <a:t>общепризнанного списка «ключевых побед РФ с 1991» в законе нет — поэтому основа доклада: исторические победы с научным консенсусом.</a:t>
+            </a:r>
+          </a:p>
+        </p:txBody>
+      </p:sp>
+      <p:sp>
+        <p:nvSpPr>
+          <p:cNvPr id="7" name="Rectangle 6"/>
+          <p:cNvSpPr/>
+          <p:nvPr/>
+        </p:nvSpPr>
+        <p:spPr>
+          <a:xfrm>
+            <a:off x="640080" y="4709160"/>
+            <a:ext cx="82296" cy="1325880"/>
+          </a:xfrm>
+          <a:prstGeom prst="rect">
+            <a:avLst/>
+          </a:prstGeom>
+          <a:solidFill>
+            <a:srgbClr val="C9A227"/>
+          </a:solidFill>
+          <a:ln>
+            <a:noFill/>
+          </a:ln>
+        </p:spPr>
+        <p:style>
+          <a:lnRef idx="1">
+            <a:schemeClr val="accent1"/>
+          </a:lnRef>
+          <a:fillRef idx="3">
+            <a:schemeClr val="accent1"/>
+          </a:fillRef>
+          <a:effectRef idx="2">
+            <a:schemeClr val="accent1"/>
+          </a:effectRef>
+          <a:fontRef idx="minor">
+            <a:schemeClr val="lt1"/>
+          </a:fontRef>
+        </p:style>
+        <p:txBody>
+          <a:bodyPr rtlCol="0" anchor="ctr"/>
+          <a:lstStyle/>
+          <a:p>
+            <a:pPr algn="ctr"/>
+          </a:p>
+        </p:txBody>
+      </p:sp>
+      <p:sp>
+        <p:nvSpPr>
+          <p:cNvPr id="8" name="TextBox 7"/>
+          <p:cNvSpPr txBox="1"/>
+          <p:nvPr/>
+        </p:nvSpPr>
+        <p:spPr>
+          <a:xfrm>
+            <a:off x="548640" y="6355080"/>
+            <a:ext cx="10058400" cy="320040"/>
+          </a:xfrm>
+          <a:prstGeom prst="rect">
+            <a:avLst/>
+          </a:prstGeom>
+          <a:noFill/>
+        </p:spPr>
+        <p:txBody>
+          <a:bodyPr wrap="square">
+            <a:spAutoFit/>
+          </a:bodyPr>
+          <a:lstStyle/>
+          <a:p>
+            <a:pPr algn="l">
+              <a:defRPr sz="1100" b="0">
+                <a:solidFill>
+                  <a:srgbClr val="6B7280"/>
+                </a:solidFill>
+              </a:defRPr>
+            </a:pPr>
+            <a:r>
+              <a:t>Основы российской государственности  •  Ключевые военные победы России</a:t>
+            </a:r>
+          </a:p>
+        </p:txBody>
+      </p:sp>
+      <p:sp>
+        <p:nvSpPr>
+          <p:cNvPr id="9" name="TextBox 8"/>
+          <p:cNvSpPr txBox="1"/>
+          <p:nvPr/>
+        </p:nvSpPr>
+        <p:spPr>
+          <a:xfrm>
+            <a:off x="11064240" y="6355080"/>
+            <a:ext cx="640080" cy="320040"/>
+          </a:xfrm>
+          <a:prstGeom prst="rect">
+            <a:avLst/>
+          </a:prstGeom>
+          <a:noFill/>
+        </p:spPr>
+        <p:txBody>
+          <a:bodyPr wrap="square">
+            <a:spAutoFit/>
+          </a:bodyPr>
+          <a:lstStyle/>
+          <a:p>
+            <a:pPr algn="r">
+              <a:defRPr sz="1100" b="0">
+                <a:solidFill>
+                  <a:srgbClr val="6B7280"/>
+                </a:solidFill>
+              </a:defRPr>
+            </a:pPr>
+            <a:r>
+              <a:t>12/12</a:t>
+            </a:r>
+          </a:p>
+        </p:txBody>
+      </p:sp>
+    </p:spTree>
+  </p:cSld>
+  <p:clrMapOvr>
+    <a:masterClrMapping/>
+  </p:clrMapOvr>
+</p:sld>
+</file>
+
 <file path=ppt/slides/slide2.xml><?xml version="1.0" encoding="utf-8"?>
 <p:sld xmlns:a="http://schemas.openxmlformats.org/drawingml/2006/main" xmlns:p="http://schemas.openxmlformats.org/presentationml/2006/main" xmlns:r="http://schemas.openxmlformats.org/officeDocument/2006/relationships">
   <p:cSld>
@@ -5492,7 +6032,7 @@
               </a:defRPr>
             </a:pPr>
             <a:r>
-              <a:t>2/11</a:t>
+              <a:t>2/12</a:t>
             </a:r>
           </a:p>
         </p:txBody>
@@ -5961,7 +6501,7 @@
               </a:defRPr>
             </a:pPr>
             <a:r>
-              <a:t>3/11</a:t>
+              <a:t>3/12</a:t>
             </a:r>
           </a:p>
         </p:txBody>
@@ -6430,7 +6970,7 @@
               </a:defRPr>
             </a:pPr>
             <a:r>
-              <a:t>4/11</a:t>
+              <a:t>4/12</a:t>
             </a:r>
           </a:p>
         </p:txBody>
@@ -6899,7 +7439,7 @@
               </a:defRPr>
             </a:pPr>
             <a:r>
-              <a:t>5/11</a:t>
+              <a:t>5/12</a:t>
             </a:r>
           </a:p>
         </p:txBody>
@@ -7368,7 +7908,7 @@
               </a:defRPr>
             </a:pPr>
             <a:r>
-              <a:t>6/11</a:t>
+              <a:t>6/12</a:t>
             </a:r>
           </a:p>
         </p:txBody>
@@ -7837,7 +8377,7 @@
               </a:defRPr>
             </a:pPr>
             <a:r>
-              <a:t>7/11</a:t>
+              <a:t>7/12</a:t>
             </a:r>
           </a:p>
         </p:txBody>
@@ -8306,7 +8846,7 @@
               </a:defRPr>
             </a:pPr>
             <a:r>
-              <a:t>8/11</a:t>
+              <a:t>8/12</a:t>
             </a:r>
           </a:p>
         </p:txBody>
@@ -8775,7 +9315,7 @@
               </a:defRPr>
             </a:pPr>
             <a:r>
-              <a:t>9/11</a:t>
+              <a:t>9/12</a:t>
             </a:r>
           </a:p>
         </p:txBody>
